--- a/COLLEGRANCE_事業全体像_v2.pptx
+++ b/COLLEGRANCE_事業全体像_v2.pptx
@@ -5,28 +5,28 @@
     <p:sldMasterId id="2147483648" r:id="rId1"/>
   </p:sldMasterIdLst>
   <p:sldIdLst>
-    <p:sldId id="256" r:id="rId7"/>
-    <p:sldId id="257" r:id="rId8"/>
-    <p:sldId id="258" r:id="rId9"/>
-    <p:sldId id="259" r:id="rId10"/>
-    <p:sldId id="260" r:id="rId11"/>
-    <p:sldId id="261" r:id="rId12"/>
-    <p:sldId id="262" r:id="rId13"/>
-    <p:sldId id="263" r:id="rId14"/>
-    <p:sldId id="264" r:id="rId15"/>
-    <p:sldId id="265" r:id="rId16"/>
-    <p:sldId id="266" r:id="rId17"/>
-    <p:sldId id="267" r:id="rId18"/>
-    <p:sldId id="268" r:id="rId19"/>
-    <p:sldId id="269" r:id="rId20"/>
-    <p:sldId id="270" r:id="rId21"/>
-    <p:sldId id="271" r:id="rId22"/>
-    <p:sldId id="272" r:id="rId23"/>
-    <p:sldId id="273" r:id="rId24"/>
-    <p:sldId id="274" r:id="rId25"/>
-    <p:sldId id="275" r:id="rId26"/>
+    <p:sldId id="256" r:id="rId2"/>
+    <p:sldId id="257" r:id="rId3"/>
+    <p:sldId id="258" r:id="rId4"/>
+    <p:sldId id="259" r:id="rId5"/>
+    <p:sldId id="260" r:id="rId6"/>
+    <p:sldId id="261" r:id="rId7"/>
+    <p:sldId id="262" r:id="rId8"/>
+    <p:sldId id="263" r:id="rId9"/>
+    <p:sldId id="264" r:id="rId10"/>
+    <p:sldId id="265" r:id="rId11"/>
+    <p:sldId id="266" r:id="rId12"/>
+    <p:sldId id="267" r:id="rId13"/>
+    <p:sldId id="268" r:id="rId14"/>
+    <p:sldId id="269" r:id="rId15"/>
+    <p:sldId id="270" r:id="rId16"/>
+    <p:sldId id="271" r:id="rId17"/>
+    <p:sldId id="272" r:id="rId18"/>
+    <p:sldId id="273" r:id="rId19"/>
+    <p:sldId id="274" r:id="rId20"/>
+    <p:sldId id="275" r:id="rId21"/>
   </p:sldIdLst>
-  <p:sldSz cx="12191695" cy="6858000" type="screen4x3"/>
+  <p:sldSz cx="12192000" cy="6858000"/>
   <p:notesSz cx="6858000" cy="9144000"/>
   <p:defaultTextStyle>
     <a:defPPr>
@@ -123,6 +123,22 @@
       </a:defRPr>
     </a:lvl9pPr>
   </p:defaultTextStyle>
+  <p:extLst>
+    <p:ext uri="{EFAFB233-063F-42B5-8137-9DF3F51BA10A}">
+      <p15:sldGuideLst xmlns:p15="http://schemas.microsoft.com/office/powerpoint/2012/main">
+        <p15:guide id="1" orient="horz" pos="2160">
+          <p15:clr>
+            <a:srgbClr val="A4A3A4"/>
+          </p15:clr>
+        </p15:guide>
+        <p15:guide id="2" pos="2880">
+          <p15:clr>
+            <a:srgbClr val="A4A3A4"/>
+          </p15:clr>
+        </p15:guide>
+      </p15:sldGuideLst>
+    </p:ext>
+  </p:extLst>
 </p:presentation>
 </file>
 
@@ -164,10 +180,9 @@
           <a:lstStyle/>
           <a:p>
             <a:r>
-              <a:rPr lang="en-US" smtClean="0"/>
+              <a:rPr lang="en-US"/>
               <a:t>Click to edit Master title style</a:t>
             </a:r>
-            <a:endParaRPr lang="en-US"/>
           </a:p>
         </p:txBody>
       </p:sp>
@@ -283,10 +298,9 @@
           </a:lstStyle>
           <a:p>
             <a:r>
-              <a:rPr lang="en-US" smtClean="0"/>
+              <a:rPr lang="en-US"/>
               <a:t>Click to edit Master subtitle style</a:t>
             </a:r>
-            <a:endParaRPr lang="en-US"/>
           </a:p>
         </p:txBody>
       </p:sp>
@@ -307,7 +321,7 @@
           <a:p>
             <a:fld id="{5BCAD085-E8A6-8845-BD4E-CB4CCA059FC4}" type="datetimeFigureOut">
               <a:rPr lang="en-US" smtClean="0"/>
-              <a:t>1/27/13</a:t>
+              <a:t>4/17/26</a:t>
             </a:fld>
             <a:endParaRPr lang="en-US"/>
           </a:p>
@@ -401,10 +415,9 @@
           <a:lstStyle/>
           <a:p>
             <a:r>
-              <a:rPr lang="en-US" smtClean="0"/>
+              <a:rPr lang="en-US"/>
               <a:t>Click to edit Master title style</a:t>
             </a:r>
-            <a:endParaRPr lang="en-US"/>
           </a:p>
         </p:txBody>
       </p:sp>
@@ -425,38 +438,37 @@
           <a:p>
             <a:pPr lvl="0"/>
             <a:r>
-              <a:rPr lang="en-US" smtClean="0"/>
+              <a:rPr lang="en-US"/>
               <a:t>Click to edit Master text styles</a:t>
             </a:r>
           </a:p>
           <a:p>
             <a:pPr lvl="1"/>
             <a:r>
-              <a:rPr lang="en-US" smtClean="0"/>
+              <a:rPr lang="en-US"/>
               <a:t>Second level</a:t>
             </a:r>
           </a:p>
           <a:p>
             <a:pPr lvl="2"/>
             <a:r>
-              <a:rPr lang="en-US" smtClean="0"/>
+              <a:rPr lang="en-US"/>
               <a:t>Third level</a:t>
             </a:r>
           </a:p>
           <a:p>
             <a:pPr lvl="3"/>
             <a:r>
-              <a:rPr lang="en-US" smtClean="0"/>
+              <a:rPr lang="en-US"/>
               <a:t>Fourth level</a:t>
             </a:r>
           </a:p>
           <a:p>
             <a:pPr lvl="4"/>
             <a:r>
-              <a:rPr lang="en-US" smtClean="0"/>
+              <a:rPr lang="en-US"/>
               <a:t>Fifth level</a:t>
             </a:r>
-            <a:endParaRPr lang="en-US"/>
           </a:p>
         </p:txBody>
       </p:sp>
@@ -477,7 +489,7 @@
           <a:p>
             <a:fld id="{5BCAD085-E8A6-8845-BD4E-CB4CCA059FC4}" type="datetimeFigureOut">
               <a:rPr lang="en-US" smtClean="0"/>
-              <a:t>1/27/13</a:t>
+              <a:t>4/17/26</a:t>
             </a:fld>
             <a:endParaRPr lang="en-US"/>
           </a:p>
@@ -576,10 +588,9 @@
           <a:lstStyle/>
           <a:p>
             <a:r>
-              <a:rPr lang="en-US" smtClean="0"/>
+              <a:rPr lang="en-US"/>
               <a:t>Click to edit Master title style</a:t>
             </a:r>
-            <a:endParaRPr lang="en-US"/>
           </a:p>
         </p:txBody>
       </p:sp>
@@ -605,38 +616,37 @@
           <a:p>
             <a:pPr lvl="0"/>
             <a:r>
-              <a:rPr lang="en-US" smtClean="0"/>
+              <a:rPr lang="en-US"/>
               <a:t>Click to edit Master text styles</a:t>
             </a:r>
           </a:p>
           <a:p>
             <a:pPr lvl="1"/>
             <a:r>
-              <a:rPr lang="en-US" smtClean="0"/>
+              <a:rPr lang="en-US"/>
               <a:t>Second level</a:t>
             </a:r>
           </a:p>
           <a:p>
             <a:pPr lvl="2"/>
             <a:r>
-              <a:rPr lang="en-US" smtClean="0"/>
+              <a:rPr lang="en-US"/>
               <a:t>Third level</a:t>
             </a:r>
           </a:p>
           <a:p>
             <a:pPr lvl="3"/>
             <a:r>
-              <a:rPr lang="en-US" smtClean="0"/>
+              <a:rPr lang="en-US"/>
               <a:t>Fourth level</a:t>
             </a:r>
           </a:p>
           <a:p>
             <a:pPr lvl="4"/>
             <a:r>
-              <a:rPr lang="en-US" smtClean="0"/>
+              <a:rPr lang="en-US"/>
               <a:t>Fifth level</a:t>
             </a:r>
-            <a:endParaRPr lang="en-US"/>
           </a:p>
         </p:txBody>
       </p:sp>
@@ -657,7 +667,7 @@
           <a:p>
             <a:fld id="{5BCAD085-E8A6-8845-BD4E-CB4CCA059FC4}" type="datetimeFigureOut">
               <a:rPr lang="en-US" smtClean="0"/>
-              <a:t>1/27/13</a:t>
+              <a:t>4/17/26</a:t>
             </a:fld>
             <a:endParaRPr lang="en-US"/>
           </a:p>
@@ -751,10 +761,9 @@
           <a:lstStyle/>
           <a:p>
             <a:r>
-              <a:rPr lang="en-US" smtClean="0"/>
+              <a:rPr lang="en-US"/>
               <a:t>Click to edit Master title style</a:t>
             </a:r>
-            <a:endParaRPr lang="en-US"/>
           </a:p>
         </p:txBody>
       </p:sp>
@@ -775,38 +784,37 @@
           <a:p>
             <a:pPr lvl="0"/>
             <a:r>
-              <a:rPr lang="en-US" smtClean="0"/>
+              <a:rPr lang="en-US"/>
               <a:t>Click to edit Master text styles</a:t>
             </a:r>
           </a:p>
           <a:p>
             <a:pPr lvl="1"/>
             <a:r>
-              <a:rPr lang="en-US" smtClean="0"/>
+              <a:rPr lang="en-US"/>
               <a:t>Second level</a:t>
             </a:r>
           </a:p>
           <a:p>
             <a:pPr lvl="2"/>
             <a:r>
-              <a:rPr lang="en-US" smtClean="0"/>
+              <a:rPr lang="en-US"/>
               <a:t>Third level</a:t>
             </a:r>
           </a:p>
           <a:p>
             <a:pPr lvl="3"/>
             <a:r>
-              <a:rPr lang="en-US" smtClean="0"/>
+              <a:rPr lang="en-US"/>
               <a:t>Fourth level</a:t>
             </a:r>
           </a:p>
           <a:p>
             <a:pPr lvl="4"/>
             <a:r>
-              <a:rPr lang="en-US" smtClean="0"/>
+              <a:rPr lang="en-US"/>
               <a:t>Fifth level</a:t>
             </a:r>
-            <a:endParaRPr lang="en-US"/>
           </a:p>
         </p:txBody>
       </p:sp>
@@ -827,7 +835,7 @@
           <a:p>
             <a:fld id="{5BCAD085-E8A6-8845-BD4E-CB4CCA059FC4}" type="datetimeFigureOut">
               <a:rPr lang="en-US" smtClean="0"/>
-              <a:t>1/27/13</a:t>
+              <a:t>4/17/26</a:t>
             </a:fld>
             <a:endParaRPr lang="en-US"/>
           </a:p>
@@ -930,10 +938,9 @@
           </a:lstStyle>
           <a:p>
             <a:r>
-              <a:rPr lang="en-US" smtClean="0"/>
+              <a:rPr lang="en-US"/>
               <a:t>Click to edit Master title style</a:t>
             </a:r>
-            <a:endParaRPr lang="en-US"/>
           </a:p>
         </p:txBody>
       </p:sp>
@@ -1050,7 +1057,7 @@
           <a:p>
             <a:pPr lvl="0"/>
             <a:r>
-              <a:rPr lang="en-US" smtClean="0"/>
+              <a:rPr lang="en-US"/>
               <a:t>Click to edit Master text styles</a:t>
             </a:r>
           </a:p>
@@ -1073,7 +1080,7 @@
           <a:p>
             <a:fld id="{5BCAD085-E8A6-8845-BD4E-CB4CCA059FC4}" type="datetimeFigureOut">
               <a:rPr lang="en-US" smtClean="0"/>
-              <a:t>1/27/13</a:t>
+              <a:t>4/17/26</a:t>
             </a:fld>
             <a:endParaRPr lang="en-US"/>
           </a:p>
@@ -1167,10 +1174,9 @@
           <a:lstStyle/>
           <a:p>
             <a:r>
-              <a:rPr lang="en-US" smtClean="0"/>
+              <a:rPr lang="en-US"/>
               <a:t>Click to edit Master title style</a:t>
             </a:r>
-            <a:endParaRPr lang="en-US"/>
           </a:p>
         </p:txBody>
       </p:sp>
@@ -1224,38 +1230,37 @@
           <a:p>
             <a:pPr lvl="0"/>
             <a:r>
-              <a:rPr lang="en-US" smtClean="0"/>
+              <a:rPr lang="en-US"/>
               <a:t>Click to edit Master text styles</a:t>
             </a:r>
           </a:p>
           <a:p>
             <a:pPr lvl="1"/>
             <a:r>
-              <a:rPr lang="en-US" smtClean="0"/>
+              <a:rPr lang="en-US"/>
               <a:t>Second level</a:t>
             </a:r>
           </a:p>
           <a:p>
             <a:pPr lvl="2"/>
             <a:r>
-              <a:rPr lang="en-US" smtClean="0"/>
+              <a:rPr lang="en-US"/>
               <a:t>Third level</a:t>
             </a:r>
           </a:p>
           <a:p>
             <a:pPr lvl="3"/>
             <a:r>
-              <a:rPr lang="en-US" smtClean="0"/>
+              <a:rPr lang="en-US"/>
               <a:t>Fourth level</a:t>
             </a:r>
           </a:p>
           <a:p>
             <a:pPr lvl="4"/>
             <a:r>
-              <a:rPr lang="en-US" smtClean="0"/>
+              <a:rPr lang="en-US"/>
               <a:t>Fifth level</a:t>
             </a:r>
-            <a:endParaRPr lang="en-US"/>
           </a:p>
         </p:txBody>
       </p:sp>
@@ -1309,38 +1314,37 @@
           <a:p>
             <a:pPr lvl="0"/>
             <a:r>
-              <a:rPr lang="en-US" smtClean="0"/>
+              <a:rPr lang="en-US"/>
               <a:t>Click to edit Master text styles</a:t>
             </a:r>
           </a:p>
           <a:p>
             <a:pPr lvl="1"/>
             <a:r>
-              <a:rPr lang="en-US" smtClean="0"/>
+              <a:rPr lang="en-US"/>
               <a:t>Second level</a:t>
             </a:r>
           </a:p>
           <a:p>
             <a:pPr lvl="2"/>
             <a:r>
-              <a:rPr lang="en-US" smtClean="0"/>
+              <a:rPr lang="en-US"/>
               <a:t>Third level</a:t>
             </a:r>
           </a:p>
           <a:p>
             <a:pPr lvl="3"/>
             <a:r>
-              <a:rPr lang="en-US" smtClean="0"/>
+              <a:rPr lang="en-US"/>
               <a:t>Fourth level</a:t>
             </a:r>
           </a:p>
           <a:p>
             <a:pPr lvl="4"/>
             <a:r>
-              <a:rPr lang="en-US" smtClean="0"/>
+              <a:rPr lang="en-US"/>
               <a:t>Fifth level</a:t>
             </a:r>
-            <a:endParaRPr lang="en-US"/>
           </a:p>
         </p:txBody>
       </p:sp>
@@ -1361,7 +1365,7 @@
           <a:p>
             <a:fld id="{5BCAD085-E8A6-8845-BD4E-CB4CCA059FC4}" type="datetimeFigureOut">
               <a:rPr lang="en-US" smtClean="0"/>
-              <a:t>1/27/13</a:t>
+              <a:t>4/17/26</a:t>
             </a:fld>
             <a:endParaRPr lang="en-US"/>
           </a:p>
@@ -1459,10 +1463,9 @@
           </a:lstStyle>
           <a:p>
             <a:r>
-              <a:rPr lang="en-US" smtClean="0"/>
+              <a:rPr lang="en-US"/>
               <a:t>Click to edit Master title style</a:t>
             </a:r>
-            <a:endParaRPr lang="en-US"/>
           </a:p>
         </p:txBody>
       </p:sp>
@@ -1525,7 +1528,7 @@
           <a:p>
             <a:pPr lvl="0"/>
             <a:r>
-              <a:rPr lang="en-US" smtClean="0"/>
+              <a:rPr lang="en-US"/>
               <a:t>Click to edit Master text styles</a:t>
             </a:r>
           </a:p>
@@ -1581,38 +1584,37 @@
           <a:p>
             <a:pPr lvl="0"/>
             <a:r>
-              <a:rPr lang="en-US" smtClean="0"/>
+              <a:rPr lang="en-US"/>
               <a:t>Click to edit Master text styles</a:t>
             </a:r>
           </a:p>
           <a:p>
             <a:pPr lvl="1"/>
             <a:r>
-              <a:rPr lang="en-US" smtClean="0"/>
+              <a:rPr lang="en-US"/>
               <a:t>Second level</a:t>
             </a:r>
           </a:p>
           <a:p>
             <a:pPr lvl="2"/>
             <a:r>
-              <a:rPr lang="en-US" smtClean="0"/>
+              <a:rPr lang="en-US"/>
               <a:t>Third level</a:t>
             </a:r>
           </a:p>
           <a:p>
             <a:pPr lvl="3"/>
             <a:r>
-              <a:rPr lang="en-US" smtClean="0"/>
+              <a:rPr lang="en-US"/>
               <a:t>Fourth level</a:t>
             </a:r>
           </a:p>
           <a:p>
             <a:pPr lvl="4"/>
             <a:r>
-              <a:rPr lang="en-US" smtClean="0"/>
+              <a:rPr lang="en-US"/>
               <a:t>Fifth level</a:t>
             </a:r>
-            <a:endParaRPr lang="en-US"/>
           </a:p>
         </p:txBody>
       </p:sp>
@@ -1675,7 +1677,7 @@
           <a:p>
             <a:pPr lvl="0"/>
             <a:r>
-              <a:rPr lang="en-US" smtClean="0"/>
+              <a:rPr lang="en-US"/>
               <a:t>Click to edit Master text styles</a:t>
             </a:r>
           </a:p>
@@ -1731,38 +1733,37 @@
           <a:p>
             <a:pPr lvl="0"/>
             <a:r>
-              <a:rPr lang="en-US" smtClean="0"/>
+              <a:rPr lang="en-US"/>
               <a:t>Click to edit Master text styles</a:t>
             </a:r>
           </a:p>
           <a:p>
             <a:pPr lvl="1"/>
             <a:r>
-              <a:rPr lang="en-US" smtClean="0"/>
+              <a:rPr lang="en-US"/>
               <a:t>Second level</a:t>
             </a:r>
           </a:p>
           <a:p>
             <a:pPr lvl="2"/>
             <a:r>
-              <a:rPr lang="en-US" smtClean="0"/>
+              <a:rPr lang="en-US"/>
               <a:t>Third level</a:t>
             </a:r>
           </a:p>
           <a:p>
             <a:pPr lvl="3"/>
             <a:r>
-              <a:rPr lang="en-US" smtClean="0"/>
+              <a:rPr lang="en-US"/>
               <a:t>Fourth level</a:t>
             </a:r>
           </a:p>
           <a:p>
             <a:pPr lvl="4"/>
             <a:r>
-              <a:rPr lang="en-US" smtClean="0"/>
+              <a:rPr lang="en-US"/>
               <a:t>Fifth level</a:t>
             </a:r>
-            <a:endParaRPr lang="en-US"/>
           </a:p>
         </p:txBody>
       </p:sp>
@@ -1783,7 +1784,7 @@
           <a:p>
             <a:fld id="{5BCAD085-E8A6-8845-BD4E-CB4CCA059FC4}" type="datetimeFigureOut">
               <a:rPr lang="en-US" smtClean="0"/>
-              <a:t>1/27/13</a:t>
+              <a:t>4/17/26</a:t>
             </a:fld>
             <a:endParaRPr lang="en-US"/>
           </a:p>
@@ -1877,10 +1878,9 @@
           <a:lstStyle/>
           <a:p>
             <a:r>
-              <a:rPr lang="en-US" smtClean="0"/>
+              <a:rPr lang="en-US"/>
               <a:t>Click to edit Master title style</a:t>
             </a:r>
-            <a:endParaRPr lang="en-US"/>
           </a:p>
         </p:txBody>
       </p:sp>
@@ -1901,7 +1901,7 @@
           <a:p>
             <a:fld id="{5BCAD085-E8A6-8845-BD4E-CB4CCA059FC4}" type="datetimeFigureOut">
               <a:rPr lang="en-US" smtClean="0"/>
-              <a:t>1/27/13</a:t>
+              <a:t>4/17/26</a:t>
             </a:fld>
             <a:endParaRPr lang="en-US"/>
           </a:p>
@@ -1996,7 +1996,7 @@
           <a:p>
             <a:fld id="{5BCAD085-E8A6-8845-BD4E-CB4CCA059FC4}" type="datetimeFigureOut">
               <a:rPr lang="en-US" smtClean="0"/>
-              <a:t>1/27/13</a:t>
+              <a:t>4/17/26</a:t>
             </a:fld>
             <a:endParaRPr lang="en-US"/>
           </a:p>
@@ -2099,10 +2099,9 @@
           </a:lstStyle>
           <a:p>
             <a:r>
-              <a:rPr lang="en-US" smtClean="0"/>
+              <a:rPr lang="en-US"/>
               <a:t>Click to edit Master title style</a:t>
             </a:r>
-            <a:endParaRPr lang="en-US"/>
           </a:p>
         </p:txBody>
       </p:sp>
@@ -2156,38 +2155,37 @@
           <a:p>
             <a:pPr lvl="0"/>
             <a:r>
-              <a:rPr lang="en-US" smtClean="0"/>
+              <a:rPr lang="en-US"/>
               <a:t>Click to edit Master text styles</a:t>
             </a:r>
           </a:p>
           <a:p>
             <a:pPr lvl="1"/>
             <a:r>
-              <a:rPr lang="en-US" smtClean="0"/>
+              <a:rPr lang="en-US"/>
               <a:t>Second level</a:t>
             </a:r>
           </a:p>
           <a:p>
             <a:pPr lvl="2"/>
             <a:r>
-              <a:rPr lang="en-US" smtClean="0"/>
+              <a:rPr lang="en-US"/>
               <a:t>Third level</a:t>
             </a:r>
           </a:p>
           <a:p>
             <a:pPr lvl="3"/>
             <a:r>
-              <a:rPr lang="en-US" smtClean="0"/>
+              <a:rPr lang="en-US"/>
               <a:t>Fourth level</a:t>
             </a:r>
           </a:p>
           <a:p>
             <a:pPr lvl="4"/>
             <a:r>
-              <a:rPr lang="en-US" smtClean="0"/>
+              <a:rPr lang="en-US"/>
               <a:t>Fifth level</a:t>
             </a:r>
-            <a:endParaRPr lang="en-US"/>
           </a:p>
         </p:txBody>
       </p:sp>
@@ -2250,7 +2248,7 @@
           <a:p>
             <a:pPr lvl="0"/>
             <a:r>
-              <a:rPr lang="en-US" smtClean="0"/>
+              <a:rPr lang="en-US"/>
               <a:t>Click to edit Master text styles</a:t>
             </a:r>
           </a:p>
@@ -2273,7 +2271,7 @@
           <a:p>
             <a:fld id="{5BCAD085-E8A6-8845-BD4E-CB4CCA059FC4}" type="datetimeFigureOut">
               <a:rPr lang="en-US" smtClean="0"/>
-              <a:t>1/27/13</a:t>
+              <a:t>4/17/26</a:t>
             </a:fld>
             <a:endParaRPr lang="en-US"/>
           </a:p>
@@ -2376,10 +2374,9 @@
           </a:lstStyle>
           <a:p>
             <a:r>
-              <a:rPr lang="en-US" smtClean="0"/>
+              <a:rPr lang="en-US"/>
               <a:t>Click to edit Master title style</a:t>
             </a:r>
-            <a:endParaRPr lang="en-US"/>
           </a:p>
         </p:txBody>
       </p:sp>
@@ -2503,7 +2500,7 @@
           <a:p>
             <a:pPr lvl="0"/>
             <a:r>
-              <a:rPr lang="en-US" smtClean="0"/>
+              <a:rPr lang="en-US"/>
               <a:t>Click to edit Master text styles</a:t>
             </a:r>
           </a:p>
@@ -2526,7 +2523,7 @@
           <a:p>
             <a:fld id="{5BCAD085-E8A6-8845-BD4E-CB4CCA059FC4}" type="datetimeFigureOut">
               <a:rPr lang="en-US" smtClean="0"/>
-              <a:t>1/27/13</a:t>
+              <a:t>4/17/26</a:t>
             </a:fld>
             <a:endParaRPr lang="en-US"/>
           </a:p>
@@ -2635,10 +2632,9 @@
           <a:lstStyle/>
           <a:p>
             <a:r>
-              <a:rPr lang="en-US" smtClean="0"/>
+              <a:rPr lang="en-US"/>
               <a:t>Click to edit Master title style</a:t>
             </a:r>
-            <a:endParaRPr lang="en-US"/>
           </a:p>
         </p:txBody>
       </p:sp>
@@ -2669,38 +2665,37 @@
           <a:p>
             <a:pPr lvl="0"/>
             <a:r>
-              <a:rPr lang="en-US" smtClean="0"/>
+              <a:rPr lang="en-US"/>
               <a:t>Click to edit Master text styles</a:t>
             </a:r>
           </a:p>
           <a:p>
             <a:pPr lvl="1"/>
             <a:r>
-              <a:rPr lang="en-US" smtClean="0"/>
+              <a:rPr lang="en-US"/>
               <a:t>Second level</a:t>
             </a:r>
           </a:p>
           <a:p>
             <a:pPr lvl="2"/>
             <a:r>
-              <a:rPr lang="en-US" smtClean="0"/>
+              <a:rPr lang="en-US"/>
               <a:t>Third level</a:t>
             </a:r>
           </a:p>
           <a:p>
             <a:pPr lvl="3"/>
             <a:r>
-              <a:rPr lang="en-US" smtClean="0"/>
+              <a:rPr lang="en-US"/>
               <a:t>Fourth level</a:t>
             </a:r>
           </a:p>
           <a:p>
             <a:pPr lvl="4"/>
             <a:r>
-              <a:rPr lang="en-US" smtClean="0"/>
+              <a:rPr lang="en-US"/>
               <a:t>Fifth level</a:t>
             </a:r>
-            <a:endParaRPr lang="en-US"/>
           </a:p>
         </p:txBody>
       </p:sp>
@@ -2739,7 +2734,7 @@
           <a:p>
             <a:fld id="{5BCAD085-E8A6-8845-BD4E-CB4CCA059FC4}" type="datetimeFigureOut">
               <a:rPr lang="en-US" smtClean="0"/>
-              <a:t>1/27/13</a:t>
+              <a:t>4/17/26</a:t>
             </a:fld>
             <a:endParaRPr lang="en-US"/>
           </a:p>
@@ -3098,7 +3093,7 @@
 </file>
 
 <file path=ppt/slides/slide1.xml><?xml version="1.0" encoding="utf-8"?>
-<p:sld xmlns:a="http://schemas.openxmlformats.org/drawingml/2006/main" xmlns:p="http://schemas.openxmlformats.org/presentationml/2006/main" xmlns:r="http://schemas.openxmlformats.org/officeDocument/2006/relationships">
+<p:sld xmlns:a="http://schemas.openxmlformats.org/drawingml/2006/main" xmlns:r="http://schemas.openxmlformats.org/officeDocument/2006/relationships" xmlns:p="http://schemas.openxmlformats.org/presentationml/2006/main">
   <p:cSld>
     <p:bg>
       <p:bgPr>
@@ -3114,7 +3109,14 @@
         <p:cNvGrpSpPr/>
         <p:nvPr/>
       </p:nvGrpSpPr>
-      <p:grpSpPr/>
+      <p:grpSpPr>
+        <a:xfrm>
+          <a:off x="0" y="0"/>
+          <a:ext cx="0" cy="0"/>
+          <a:chOff x="0" y="0"/>
+          <a:chExt cx="0" cy="0"/>
+        </a:xfrm>
+      </p:grpSpPr>
       <p:sp>
         <p:nvSpPr>
           <p:cNvPr id="2" name="Rectangle 1"/>
@@ -3155,6 +3157,7 @@
           <a:lstStyle/>
           <a:p>
             <a:pPr algn="ctr"/>
+            <a:endParaRPr/>
           </a:p>
         </p:txBody>
       </p:sp>
@@ -3324,6 +3327,7 @@
           <a:lstStyle/>
           <a:p>
             <a:pPr algn="ctr"/>
+            <a:endParaRPr/>
           </a:p>
         </p:txBody>
       </p:sp>
@@ -3462,7 +3466,7 @@
 </file>
 
 <file path=ppt/slides/slide10.xml><?xml version="1.0" encoding="utf-8"?>
-<p:sld xmlns:a="http://schemas.openxmlformats.org/drawingml/2006/main" xmlns:p="http://schemas.openxmlformats.org/presentationml/2006/main" xmlns:r="http://schemas.openxmlformats.org/officeDocument/2006/relationships">
+<p:sld xmlns:a="http://schemas.openxmlformats.org/drawingml/2006/main" xmlns:r="http://schemas.openxmlformats.org/officeDocument/2006/relationships" xmlns:p="http://schemas.openxmlformats.org/presentationml/2006/main">
   <p:cSld>
     <p:spTree>
       <p:nvGrpSpPr>
@@ -3470,7 +3474,14 @@
         <p:cNvGrpSpPr/>
         <p:nvPr/>
       </p:nvGrpSpPr>
-      <p:grpSpPr/>
+      <p:grpSpPr>
+        <a:xfrm>
+          <a:off x="0" y="0"/>
+          <a:ext cx="0" cy="0"/>
+          <a:chOff x="0" y="0"/>
+          <a:chExt cx="0" cy="0"/>
+        </a:xfrm>
+      </p:grpSpPr>
       <p:sp>
         <p:nvSpPr>
           <p:cNvPr id="2" name="Rectangle 1"/>
@@ -3511,6 +3522,7 @@
           <a:lstStyle/>
           <a:p>
             <a:pPr algn="ctr"/>
+            <a:endParaRPr/>
           </a:p>
         </p:txBody>
       </p:sp>
@@ -3636,7 +3648,7 @@
           </a:fontRef>
         </p:style>
         <p:txBody>
-          <a:bodyPr rtlCol="0" anchor="ctr" wrap="square"/>
+          <a:bodyPr wrap="square" rtlCol="0" anchor="ctr"/>
           <a:lstStyle/>
           <a:p>
             <a:pPr algn="ctr">
@@ -3699,6 +3711,7 @@
           <a:lstStyle/>
           <a:p>
             <a:pPr algn="ctr"/>
+            <a:endParaRPr/>
           </a:p>
         </p:txBody>
       </p:sp>
@@ -3740,7 +3753,7 @@
           </a:fontRef>
         </p:style>
         <p:txBody>
-          <a:bodyPr rtlCol="0" anchor="ctr" wrap="square"/>
+          <a:bodyPr wrap="square" rtlCol="0" anchor="ctr"/>
           <a:lstStyle/>
           <a:p>
             <a:pPr algn="ctr">
@@ -3803,6 +3816,7 @@
           <a:lstStyle/>
           <a:p>
             <a:pPr algn="ctr"/>
+            <a:endParaRPr/>
           </a:p>
         </p:txBody>
       </p:sp>
@@ -3844,7 +3858,7 @@
           </a:fontRef>
         </p:style>
         <p:txBody>
-          <a:bodyPr rtlCol="0" anchor="ctr" wrap="square"/>
+          <a:bodyPr wrap="square" rtlCol="0" anchor="ctr"/>
           <a:lstStyle/>
           <a:p>
             <a:pPr algn="ctr">
@@ -3907,6 +3921,7 @@
           <a:lstStyle/>
           <a:p>
             <a:pPr algn="ctr"/>
+            <a:endParaRPr/>
           </a:p>
         </p:txBody>
       </p:sp>
@@ -3948,7 +3963,7 @@
           </a:fontRef>
         </p:style>
         <p:txBody>
-          <a:bodyPr rtlCol="0" anchor="ctr" wrap="square"/>
+          <a:bodyPr wrap="square" rtlCol="0" anchor="ctr"/>
           <a:lstStyle/>
           <a:p>
             <a:pPr algn="ctr">
@@ -4009,7 +4024,7 @@
           </a:fontRef>
         </p:style>
         <p:txBody>
-          <a:bodyPr rtlCol="0" anchor="ctr" wrap="square"/>
+          <a:bodyPr wrap="square" rtlCol="0" anchor="ctr"/>
           <a:lstStyle/>
           <a:p>
             <a:pPr algn="ctr">
@@ -4074,7 +4089,7 @@
           </a:fontRef>
         </p:style>
         <p:txBody>
-          <a:bodyPr rtlCol="0" anchor="ctr" wrap="square"/>
+          <a:bodyPr wrap="square" rtlCol="0" anchor="ctr"/>
           <a:lstStyle/>
           <a:p>
             <a:pPr algn="ctr">
@@ -4274,7 +4289,7 @@
 </file>
 
 <file path=ppt/slides/slide11.xml><?xml version="1.0" encoding="utf-8"?>
-<p:sld xmlns:a="http://schemas.openxmlformats.org/drawingml/2006/main" xmlns:p="http://schemas.openxmlformats.org/presentationml/2006/main" xmlns:r="http://schemas.openxmlformats.org/officeDocument/2006/relationships">
+<p:sld xmlns:a="http://schemas.openxmlformats.org/drawingml/2006/main" xmlns:r="http://schemas.openxmlformats.org/officeDocument/2006/relationships" xmlns:p="http://schemas.openxmlformats.org/presentationml/2006/main">
   <p:cSld>
     <p:spTree>
       <p:nvGrpSpPr>
@@ -4282,7 +4297,14 @@
         <p:cNvGrpSpPr/>
         <p:nvPr/>
       </p:nvGrpSpPr>
-      <p:grpSpPr/>
+      <p:grpSpPr>
+        <a:xfrm>
+          <a:off x="0" y="0"/>
+          <a:ext cx="0" cy="0"/>
+          <a:chOff x="0" y="0"/>
+          <a:chExt cx="0" cy="0"/>
+        </a:xfrm>
+      </p:grpSpPr>
       <p:sp>
         <p:nvSpPr>
           <p:cNvPr id="2" name="Rectangle 1"/>
@@ -4323,6 +4345,7 @@
           <a:lstStyle/>
           <a:p>
             <a:pPr algn="ctr"/>
+            <a:endParaRPr/>
           </a:p>
         </p:txBody>
       </p:sp>
@@ -4490,7 +4513,7 @@
           </a:fontRef>
         </p:style>
         <p:txBody>
-          <a:bodyPr rtlCol="0" anchor="ctr" wrap="square"/>
+          <a:bodyPr wrap="square" rtlCol="0" anchor="ctr"/>
           <a:lstStyle/>
           <a:p>
             <a:pPr algn="ctr">
@@ -4551,7 +4574,7 @@
           </a:fontRef>
         </p:style>
         <p:txBody>
-          <a:bodyPr rtlCol="0" anchor="ctr" wrap="square"/>
+          <a:bodyPr wrap="square" rtlCol="0" anchor="ctr"/>
           <a:lstStyle/>
           <a:p>
             <a:pPr algn="ctr">
@@ -4612,7 +4635,7 @@
           </a:fontRef>
         </p:style>
         <p:txBody>
-          <a:bodyPr rtlCol="0" anchor="ctr" wrap="square"/>
+          <a:bodyPr wrap="square" rtlCol="0" anchor="ctr"/>
           <a:lstStyle/>
           <a:p>
             <a:pPr algn="ctr">
@@ -4757,7 +4780,7 @@
           </a:fontRef>
         </p:style>
         <p:txBody>
-          <a:bodyPr rtlCol="0" anchor="ctr" wrap="square"/>
+          <a:bodyPr wrap="square" rtlCol="0" anchor="ctr"/>
           <a:lstStyle/>
           <a:p>
             <a:pPr algn="ctr">
@@ -4860,7 +4883,7 @@
           </a:fontRef>
         </p:style>
         <p:txBody>
-          <a:bodyPr rtlCol="0" anchor="ctr" wrap="square"/>
+          <a:bodyPr wrap="square" rtlCol="0" anchor="ctr"/>
           <a:lstStyle/>
           <a:p>
             <a:pPr algn="ctr">
@@ -4963,7 +4986,7 @@
           </a:fontRef>
         </p:style>
         <p:txBody>
-          <a:bodyPr rtlCol="0" anchor="ctr" wrap="square"/>
+          <a:bodyPr wrap="square" rtlCol="0" anchor="ctr"/>
           <a:lstStyle/>
           <a:p>
             <a:pPr algn="ctr">
@@ -5066,7 +5089,7 @@
           </a:fontRef>
         </p:style>
         <p:txBody>
-          <a:bodyPr rtlCol="0" anchor="ctr" wrap="square"/>
+          <a:bodyPr wrap="square" rtlCol="0" anchor="ctr"/>
           <a:lstStyle/>
           <a:p>
             <a:pPr algn="ctr">
@@ -5169,7 +5192,7 @@
           </a:fontRef>
         </p:style>
         <p:txBody>
-          <a:bodyPr rtlCol="0" anchor="ctr" wrap="square"/>
+          <a:bodyPr wrap="square" rtlCol="0" anchor="ctr"/>
           <a:lstStyle/>
           <a:p>
             <a:pPr algn="ctr">
@@ -5272,7 +5295,7 @@
           </a:fontRef>
         </p:style>
         <p:txBody>
-          <a:bodyPr rtlCol="0" anchor="ctr" wrap="square"/>
+          <a:bodyPr wrap="square" rtlCol="0" anchor="ctr"/>
           <a:lstStyle/>
           <a:p>
             <a:pPr algn="ctr">
@@ -5459,7 +5482,7 @@
           </a:fontRef>
         </p:style>
         <p:txBody>
-          <a:bodyPr rtlCol="0" anchor="ctr" wrap="square"/>
+          <a:bodyPr wrap="square" rtlCol="0" anchor="ctr"/>
           <a:lstStyle/>
           <a:p>
             <a:pPr algn="ctr">
@@ -5562,7 +5585,7 @@
           </a:fontRef>
         </p:style>
         <p:txBody>
-          <a:bodyPr rtlCol="0" anchor="ctr" wrap="square"/>
+          <a:bodyPr wrap="square" rtlCol="0" anchor="ctr"/>
           <a:lstStyle/>
           <a:p>
             <a:pPr algn="ctr">
@@ -5665,7 +5688,7 @@
           </a:fontRef>
         </p:style>
         <p:txBody>
-          <a:bodyPr rtlCol="0" anchor="ctr" wrap="square"/>
+          <a:bodyPr wrap="square" rtlCol="0" anchor="ctr"/>
           <a:lstStyle/>
           <a:p>
             <a:pPr algn="ctr">
@@ -5768,7 +5791,7 @@
           </a:fontRef>
         </p:style>
         <p:txBody>
-          <a:bodyPr rtlCol="0" anchor="ctr" wrap="square"/>
+          <a:bodyPr wrap="square" rtlCol="0" anchor="ctr"/>
           <a:lstStyle/>
           <a:p>
             <a:pPr algn="ctr">
@@ -5871,7 +5894,7 @@
           </a:fontRef>
         </p:style>
         <p:txBody>
-          <a:bodyPr rtlCol="0" anchor="ctr" wrap="square"/>
+          <a:bodyPr wrap="square" rtlCol="0" anchor="ctr"/>
           <a:lstStyle/>
           <a:p>
             <a:pPr algn="ctr">
@@ -6016,7 +6039,7 @@
           </a:fontRef>
         </p:style>
         <p:txBody>
-          <a:bodyPr rtlCol="0" anchor="ctr" wrap="square"/>
+          <a:bodyPr wrap="square" rtlCol="0" anchor="ctr"/>
           <a:lstStyle/>
           <a:p>
             <a:pPr algn="ctr">
@@ -6119,7 +6142,7 @@
           </a:fontRef>
         </p:style>
         <p:txBody>
-          <a:bodyPr rtlCol="0" anchor="ctr" wrap="square"/>
+          <a:bodyPr wrap="square" rtlCol="0" anchor="ctr"/>
           <a:lstStyle/>
           <a:p>
             <a:pPr algn="ctr">
@@ -6222,7 +6245,7 @@
           </a:fontRef>
         </p:style>
         <p:txBody>
-          <a:bodyPr rtlCol="0" anchor="ctr" wrap="square"/>
+          <a:bodyPr wrap="square" rtlCol="0" anchor="ctr"/>
           <a:lstStyle/>
           <a:p>
             <a:pPr algn="ctr">
@@ -6325,7 +6348,7 @@
           </a:fontRef>
         </p:style>
         <p:txBody>
-          <a:bodyPr rtlCol="0" anchor="ctr" wrap="square"/>
+          <a:bodyPr wrap="square" rtlCol="0" anchor="ctr"/>
           <a:lstStyle/>
           <a:p>
             <a:pPr algn="ctr">
@@ -6428,7 +6451,7 @@
           </a:fontRef>
         </p:style>
         <p:txBody>
-          <a:bodyPr rtlCol="0" anchor="ctr" wrap="square"/>
+          <a:bodyPr wrap="square" rtlCol="0" anchor="ctr"/>
           <a:lstStyle/>
           <a:p>
             <a:pPr algn="ctr">
@@ -6531,7 +6554,7 @@
           </a:fontRef>
         </p:style>
         <p:txBody>
-          <a:bodyPr rtlCol="0" anchor="ctr" wrap="square"/>
+          <a:bodyPr wrap="square" rtlCol="0" anchor="ctr"/>
           <a:lstStyle/>
           <a:p>
             <a:pPr algn="ctr">
@@ -7067,7 +7090,7 @@
 </file>
 
 <file path=ppt/slides/slide12.xml><?xml version="1.0" encoding="utf-8"?>
-<p:sld xmlns:a="http://schemas.openxmlformats.org/drawingml/2006/main" xmlns:p="http://schemas.openxmlformats.org/presentationml/2006/main" xmlns:r="http://schemas.openxmlformats.org/officeDocument/2006/relationships">
+<p:sld xmlns:a="http://schemas.openxmlformats.org/drawingml/2006/main" xmlns:r="http://schemas.openxmlformats.org/officeDocument/2006/relationships" xmlns:p="http://schemas.openxmlformats.org/presentationml/2006/main">
   <p:cSld>
     <p:spTree>
       <p:nvGrpSpPr>
@@ -7075,7 +7098,14 @@
         <p:cNvGrpSpPr/>
         <p:nvPr/>
       </p:nvGrpSpPr>
-      <p:grpSpPr/>
+      <p:grpSpPr>
+        <a:xfrm>
+          <a:off x="0" y="0"/>
+          <a:ext cx="0" cy="0"/>
+          <a:chOff x="0" y="0"/>
+          <a:chExt cx="0" cy="0"/>
+        </a:xfrm>
+      </p:grpSpPr>
       <p:sp>
         <p:nvSpPr>
           <p:cNvPr id="2" name="Rectangle 1"/>
@@ -7116,6 +7146,7 @@
           <a:lstStyle/>
           <a:p>
             <a:pPr algn="ctr"/>
+            <a:endParaRPr/>
           </a:p>
         </p:txBody>
       </p:sp>
@@ -7180,11 +7211,41 @@
                 <a:tableStyleId>{5C22544A-7EE6-4342-B048-85BDC9FD1C3A}</a:tableStyleId>
               </a:tblPr>
               <a:tblGrid>
-                <a:gridCol w="1828800"/>
-                <a:gridCol w="1828800"/>
-                <a:gridCol w="2560320"/>
-                <a:gridCol w="1828800"/>
-                <a:gridCol w="3200400"/>
+                <a:gridCol w="1828800">
+                  <a:extLst>
+                    <a:ext uri="{9D8B030D-6E8A-4147-A177-3AD203B41FA5}">
+                      <a16:colId xmlns:a16="http://schemas.microsoft.com/office/drawing/2014/main" val="20000"/>
+                    </a:ext>
+                  </a:extLst>
+                </a:gridCol>
+                <a:gridCol w="1828800">
+                  <a:extLst>
+                    <a:ext uri="{9D8B030D-6E8A-4147-A177-3AD203B41FA5}">
+                      <a16:colId xmlns:a16="http://schemas.microsoft.com/office/drawing/2014/main" val="20001"/>
+                    </a:ext>
+                  </a:extLst>
+                </a:gridCol>
+                <a:gridCol w="2560320">
+                  <a:extLst>
+                    <a:ext uri="{9D8B030D-6E8A-4147-A177-3AD203B41FA5}">
+                      <a16:colId xmlns:a16="http://schemas.microsoft.com/office/drawing/2014/main" val="20002"/>
+                    </a:ext>
+                  </a:extLst>
+                </a:gridCol>
+                <a:gridCol w="1828800">
+                  <a:extLst>
+                    <a:ext uri="{9D8B030D-6E8A-4147-A177-3AD203B41FA5}">
+                      <a16:colId xmlns:a16="http://schemas.microsoft.com/office/drawing/2014/main" val="20003"/>
+                    </a:ext>
+                  </a:extLst>
+                </a:gridCol>
+                <a:gridCol w="3200400">
+                  <a:extLst>
+                    <a:ext uri="{9D8B030D-6E8A-4147-A177-3AD203B41FA5}">
+                      <a16:colId xmlns:a16="http://schemas.microsoft.com/office/drawing/2014/main" val="20004"/>
+                    </a:ext>
+                  </a:extLst>
+                </a:gridCol>
               </a:tblGrid>
               <a:tr h="533400">
                 <a:tc>
@@ -7337,6 +7398,11 @@
                     </a:solidFill>
                   </a:tcPr>
                 </a:tc>
+                <a:extLst>
+                  <a:ext uri="{0D108BD9-81ED-4DB2-BD59-A6C34878D82A}">
+                    <a16:rowId xmlns:a16="http://schemas.microsoft.com/office/drawing/2014/main" val="10000"/>
+                  </a:ext>
+                </a:extLst>
               </a:tr>
               <a:tr h="533400">
                 <a:tc>
@@ -7489,6 +7555,11 @@
                     </a:solidFill>
                   </a:tcPr>
                 </a:tc>
+                <a:extLst>
+                  <a:ext uri="{0D108BD9-81ED-4DB2-BD59-A6C34878D82A}">
+                    <a16:rowId xmlns:a16="http://schemas.microsoft.com/office/drawing/2014/main" val="10001"/>
+                  </a:ext>
+                </a:extLst>
               </a:tr>
               <a:tr h="533400">
                 <a:tc>
@@ -7641,6 +7712,11 @@
                     </a:solidFill>
                   </a:tcPr>
                 </a:tc>
+                <a:extLst>
+                  <a:ext uri="{0D108BD9-81ED-4DB2-BD59-A6C34878D82A}">
+                    <a16:rowId xmlns:a16="http://schemas.microsoft.com/office/drawing/2014/main" val="10002"/>
+                  </a:ext>
+                </a:extLst>
               </a:tr>
               <a:tr h="533400">
                 <a:tc>
@@ -7793,6 +7869,11 @@
                     </a:solidFill>
                   </a:tcPr>
                 </a:tc>
+                <a:extLst>
+                  <a:ext uri="{0D108BD9-81ED-4DB2-BD59-A6C34878D82A}">
+                    <a16:rowId xmlns:a16="http://schemas.microsoft.com/office/drawing/2014/main" val="10003"/>
+                  </a:ext>
+                </a:extLst>
               </a:tr>
               <a:tr h="533400">
                 <a:tc>
@@ -7945,6 +8026,11 @@
                     </a:solidFill>
                   </a:tcPr>
                 </a:tc>
+                <a:extLst>
+                  <a:ext uri="{0D108BD9-81ED-4DB2-BD59-A6C34878D82A}">
+                    <a16:rowId xmlns:a16="http://schemas.microsoft.com/office/drawing/2014/main" val="10004"/>
+                  </a:ext>
+                </a:extLst>
               </a:tr>
               <a:tr h="533400">
                 <a:tc>
@@ -8097,6 +8183,11 @@
                     </a:solidFill>
                   </a:tcPr>
                 </a:tc>
+                <a:extLst>
+                  <a:ext uri="{0D108BD9-81ED-4DB2-BD59-A6C34878D82A}">
+                    <a16:rowId xmlns:a16="http://schemas.microsoft.com/office/drawing/2014/main" val="10005"/>
+                  </a:ext>
+                </a:extLst>
               </a:tr>
             </a:tbl>
           </a:graphicData>
@@ -8182,7 +8273,7 @@
           </a:fontRef>
         </p:style>
         <p:txBody>
-          <a:bodyPr rtlCol="0" anchor="ctr" wrap="square"/>
+          <a:bodyPr wrap="square" rtlCol="0" anchor="ctr"/>
           <a:lstStyle/>
           <a:p>
             <a:pPr algn="ctr">
@@ -8193,6 +8284,7 @@
                 <a:spcPts val="0"/>
               </a:spcAft>
             </a:pPr>
+            <a:endParaRPr/>
           </a:p>
         </p:txBody>
       </p:sp>
@@ -8318,7 +8410,7 @@
           </a:fontRef>
         </p:style>
         <p:txBody>
-          <a:bodyPr rtlCol="0" anchor="ctr" wrap="square"/>
+          <a:bodyPr wrap="square" rtlCol="0" anchor="ctr"/>
           <a:lstStyle/>
           <a:p>
             <a:pPr algn="ctr">
@@ -8329,6 +8421,7 @@
                 <a:spcPts val="0"/>
               </a:spcAft>
             </a:pPr>
+            <a:endParaRPr/>
           </a:p>
         </p:txBody>
       </p:sp>
@@ -8454,7 +8547,7 @@
           </a:fontRef>
         </p:style>
         <p:txBody>
-          <a:bodyPr rtlCol="0" anchor="ctr" wrap="square"/>
+          <a:bodyPr wrap="square" rtlCol="0" anchor="ctr"/>
           <a:lstStyle/>
           <a:p>
             <a:pPr algn="ctr">
@@ -8465,6 +8558,7 @@
                 <a:spcPts val="0"/>
               </a:spcAft>
             </a:pPr>
+            <a:endParaRPr/>
           </a:p>
         </p:txBody>
       </p:sp>
@@ -8645,7 +8739,7 @@
 </file>
 
 <file path=ppt/slides/slide13.xml><?xml version="1.0" encoding="utf-8"?>
-<p:sld xmlns:a="http://schemas.openxmlformats.org/drawingml/2006/main" xmlns:p="http://schemas.openxmlformats.org/presentationml/2006/main" xmlns:r="http://schemas.openxmlformats.org/officeDocument/2006/relationships">
+<p:sld xmlns:a="http://schemas.openxmlformats.org/drawingml/2006/main" xmlns:r="http://schemas.openxmlformats.org/officeDocument/2006/relationships" xmlns:p="http://schemas.openxmlformats.org/presentationml/2006/main">
   <p:cSld>
     <p:spTree>
       <p:nvGrpSpPr>
@@ -8653,7 +8747,14 @@
         <p:cNvGrpSpPr/>
         <p:nvPr/>
       </p:nvGrpSpPr>
-      <p:grpSpPr/>
+      <p:grpSpPr>
+        <a:xfrm>
+          <a:off x="0" y="0"/>
+          <a:ext cx="0" cy="0"/>
+          <a:chOff x="0" y="0"/>
+          <a:chExt cx="0" cy="0"/>
+        </a:xfrm>
+      </p:grpSpPr>
       <p:sp>
         <p:nvSpPr>
           <p:cNvPr id="2" name="Rectangle 1"/>
@@ -8694,6 +8795,7 @@
           <a:lstStyle/>
           <a:p>
             <a:pPr algn="ctr"/>
+            <a:endParaRPr/>
           </a:p>
         </p:txBody>
       </p:sp>
@@ -8819,7 +8921,7 @@
           </a:fontRef>
         </p:style>
         <p:txBody>
-          <a:bodyPr rtlCol="0" anchor="ctr" wrap="square"/>
+          <a:bodyPr wrap="square" rtlCol="0" anchor="ctr"/>
           <a:lstStyle/>
           <a:p>
             <a:pPr algn="ctr">
@@ -8922,7 +9024,7 @@
           </a:fontRef>
         </p:style>
         <p:txBody>
-          <a:bodyPr rtlCol="0" anchor="ctr" wrap="square"/>
+          <a:bodyPr wrap="square" rtlCol="0" anchor="ctr"/>
           <a:lstStyle/>
           <a:p>
             <a:pPr algn="ctr">
@@ -9027,6 +9129,7 @@
           <a:lstStyle/>
           <a:p>
             <a:pPr algn="ctr"/>
+            <a:endParaRPr/>
           </a:p>
         </p:txBody>
       </p:sp>
@@ -9068,7 +9171,7 @@
           </a:fontRef>
         </p:style>
         <p:txBody>
-          <a:bodyPr rtlCol="0" anchor="ctr" wrap="square"/>
+          <a:bodyPr wrap="square" rtlCol="0" anchor="ctr"/>
           <a:lstStyle/>
           <a:p>
             <a:pPr algn="ctr">
@@ -9173,6 +9276,7 @@
           <a:lstStyle/>
           <a:p>
             <a:pPr algn="ctr"/>
+            <a:endParaRPr/>
           </a:p>
         </p:txBody>
       </p:sp>
@@ -9214,7 +9318,7 @@
           </a:fontRef>
         </p:style>
         <p:txBody>
-          <a:bodyPr rtlCol="0" anchor="ctr" wrap="square"/>
+          <a:bodyPr wrap="square" rtlCol="0" anchor="ctr"/>
           <a:lstStyle/>
           <a:p>
             <a:pPr algn="ctr">
@@ -9323,6 +9427,7 @@
           <a:lstStyle/>
           <a:p>
             <a:pPr algn="ctr"/>
+            <a:endParaRPr/>
           </a:p>
         </p:txBody>
       </p:sp>
@@ -9364,7 +9469,7 @@
           </a:fontRef>
         </p:style>
         <p:txBody>
-          <a:bodyPr rtlCol="0" anchor="ctr" wrap="square"/>
+          <a:bodyPr wrap="square" rtlCol="0" anchor="ctr"/>
           <a:lstStyle/>
           <a:p>
             <a:pPr algn="ctr">
@@ -9513,7 +9618,7 @@
           </a:fontRef>
         </p:style>
         <p:txBody>
-          <a:bodyPr rtlCol="0" anchor="ctr" wrap="square"/>
+          <a:bodyPr wrap="square" rtlCol="0" anchor="ctr"/>
           <a:lstStyle/>
           <a:p>
             <a:pPr algn="ctr">
@@ -9618,6 +9723,7 @@
           <a:lstStyle/>
           <a:p>
             <a:pPr algn="ctr"/>
+            <a:endParaRPr/>
           </a:p>
         </p:txBody>
       </p:sp>
@@ -9659,7 +9765,7 @@
           </a:fontRef>
         </p:style>
         <p:txBody>
-          <a:bodyPr rtlCol="0" anchor="ctr" wrap="square"/>
+          <a:bodyPr wrap="square" rtlCol="0" anchor="ctr"/>
           <a:lstStyle/>
           <a:p>
             <a:pPr algn="ctr">
@@ -9764,6 +9870,7 @@
           <a:lstStyle/>
           <a:p>
             <a:pPr algn="ctr"/>
+            <a:endParaRPr/>
           </a:p>
         </p:txBody>
       </p:sp>
@@ -9805,7 +9912,7 @@
           </a:fontRef>
         </p:style>
         <p:txBody>
-          <a:bodyPr rtlCol="0" anchor="ctr" wrap="square"/>
+          <a:bodyPr wrap="square" rtlCol="0" anchor="ctr"/>
           <a:lstStyle/>
           <a:p>
             <a:pPr algn="ctr">
@@ -9912,7 +10019,7 @@
           </a:fontRef>
         </p:style>
         <p:txBody>
-          <a:bodyPr rtlCol="0" anchor="ctr" wrap="square"/>
+          <a:bodyPr wrap="square" rtlCol="0" anchor="ctr"/>
           <a:lstStyle/>
           <a:p>
             <a:pPr algn="ctr">
@@ -10028,7 +10135,7 @@
 </file>
 
 <file path=ppt/slides/slide14.xml><?xml version="1.0" encoding="utf-8"?>
-<p:sld xmlns:a="http://schemas.openxmlformats.org/drawingml/2006/main" xmlns:p="http://schemas.openxmlformats.org/presentationml/2006/main" xmlns:r="http://schemas.openxmlformats.org/officeDocument/2006/relationships">
+<p:sld xmlns:a="http://schemas.openxmlformats.org/drawingml/2006/main" xmlns:r="http://schemas.openxmlformats.org/officeDocument/2006/relationships" xmlns:p="http://schemas.openxmlformats.org/presentationml/2006/main">
   <p:cSld>
     <p:spTree>
       <p:nvGrpSpPr>
@@ -10036,7 +10143,14 @@
         <p:cNvGrpSpPr/>
         <p:nvPr/>
       </p:nvGrpSpPr>
-      <p:grpSpPr/>
+      <p:grpSpPr>
+        <a:xfrm>
+          <a:off x="0" y="0"/>
+          <a:ext cx="0" cy="0"/>
+          <a:chOff x="0" y="0"/>
+          <a:chExt cx="0" cy="0"/>
+        </a:xfrm>
+      </p:grpSpPr>
       <p:sp>
         <p:nvSpPr>
           <p:cNvPr id="2" name="Rectangle 1"/>
@@ -10077,6 +10191,7 @@
           <a:lstStyle/>
           <a:p>
             <a:pPr algn="ctr"/>
+            <a:endParaRPr/>
           </a:p>
         </p:txBody>
       </p:sp>
@@ -10292,7 +10407,7 @@
           </a:fontRef>
         </p:style>
         <p:txBody>
-          <a:bodyPr rtlCol="0" anchor="ctr" wrap="square"/>
+          <a:bodyPr wrap="square" rtlCol="0" anchor="ctr"/>
           <a:lstStyle/>
           <a:p>
             <a:pPr algn="ctr">
@@ -10319,6 +10434,7 @@
                 <a:latin typeface="Meiryo"/>
               </a:defRPr>
             </a:pPr>
+            <a:endParaRPr/>
           </a:p>
           <a:p>
             <a:pPr algn="l">
@@ -10348,6 +10464,7 @@
                 <a:latin typeface="Meiryo"/>
               </a:defRPr>
             </a:pPr>
+            <a:endParaRPr/>
           </a:p>
           <a:p>
             <a:pPr algn="l">
@@ -10409,6 +10526,7 @@
                 <a:latin typeface="Meiryo"/>
               </a:defRPr>
             </a:pPr>
+            <a:endParaRPr/>
           </a:p>
           <a:p>
             <a:pPr algn="l">
@@ -10540,7 +10658,7 @@
           </a:fontRef>
         </p:style>
         <p:txBody>
-          <a:bodyPr rtlCol="0" anchor="ctr" wrap="square"/>
+          <a:bodyPr wrap="square" rtlCol="0" anchor="ctr"/>
           <a:lstStyle/>
           <a:p>
             <a:pPr algn="ctr">
@@ -10685,7 +10803,7 @@
           </a:fontRef>
         </p:style>
         <p:txBody>
-          <a:bodyPr rtlCol="0" anchor="ctr" wrap="square"/>
+          <a:bodyPr wrap="square" rtlCol="0" anchor="ctr"/>
           <a:lstStyle/>
           <a:p>
             <a:pPr algn="ctr">
@@ -10830,7 +10948,7 @@
           </a:fontRef>
         </p:style>
         <p:txBody>
-          <a:bodyPr rtlCol="0" anchor="ctr" wrap="square"/>
+          <a:bodyPr wrap="square" rtlCol="0" anchor="ctr"/>
           <a:lstStyle/>
           <a:p>
             <a:pPr algn="ctr">
@@ -10975,7 +11093,7 @@
           </a:fontRef>
         </p:style>
         <p:txBody>
-          <a:bodyPr rtlCol="0" anchor="ctr" wrap="square"/>
+          <a:bodyPr wrap="square" rtlCol="0" anchor="ctr"/>
           <a:lstStyle/>
           <a:p>
             <a:pPr algn="ctr">
@@ -11143,9 +11261,27 @@
                 <a:tableStyleId>{5C22544A-7EE6-4342-B048-85BDC9FD1C3A}</a:tableStyleId>
               </a:tblPr>
               <a:tblGrid>
-                <a:gridCol w="1828800"/>
-                <a:gridCol w="1371600"/>
-                <a:gridCol w="2103120"/>
+                <a:gridCol w="1828800">
+                  <a:extLst>
+                    <a:ext uri="{9D8B030D-6E8A-4147-A177-3AD203B41FA5}">
+                      <a16:colId xmlns:a16="http://schemas.microsoft.com/office/drawing/2014/main" val="20000"/>
+                    </a:ext>
+                  </a:extLst>
+                </a:gridCol>
+                <a:gridCol w="1371600">
+                  <a:extLst>
+                    <a:ext uri="{9D8B030D-6E8A-4147-A177-3AD203B41FA5}">
+                      <a16:colId xmlns:a16="http://schemas.microsoft.com/office/drawing/2014/main" val="20001"/>
+                    </a:ext>
+                  </a:extLst>
+                </a:gridCol>
+                <a:gridCol w="2103120">
+                  <a:extLst>
+                    <a:ext uri="{9D8B030D-6E8A-4147-A177-3AD203B41FA5}">
+                      <a16:colId xmlns:a16="http://schemas.microsoft.com/office/drawing/2014/main" val="20002"/>
+                    </a:ext>
+                  </a:extLst>
+                </a:gridCol>
               </a:tblGrid>
               <a:tr h="329184">
                 <a:tc>
@@ -11238,6 +11374,11 @@
                     </a:solidFill>
                   </a:tcPr>
                 </a:tc>
+                <a:extLst>
+                  <a:ext uri="{0D108BD9-81ED-4DB2-BD59-A6C34878D82A}">
+                    <a16:rowId xmlns:a16="http://schemas.microsoft.com/office/drawing/2014/main" val="10000"/>
+                  </a:ext>
+                </a:extLst>
               </a:tr>
               <a:tr h="329184">
                 <a:tc>
@@ -11330,6 +11471,11 @@
                     </a:solidFill>
                   </a:tcPr>
                 </a:tc>
+                <a:extLst>
+                  <a:ext uri="{0D108BD9-81ED-4DB2-BD59-A6C34878D82A}">
+                    <a16:rowId xmlns:a16="http://schemas.microsoft.com/office/drawing/2014/main" val="10001"/>
+                  </a:ext>
+                </a:extLst>
               </a:tr>
               <a:tr h="329184">
                 <a:tc>
@@ -11422,6 +11568,11 @@
                     </a:solidFill>
                   </a:tcPr>
                 </a:tc>
+                <a:extLst>
+                  <a:ext uri="{0D108BD9-81ED-4DB2-BD59-A6C34878D82A}">
+                    <a16:rowId xmlns:a16="http://schemas.microsoft.com/office/drawing/2014/main" val="10002"/>
+                  </a:ext>
+                </a:extLst>
               </a:tr>
               <a:tr h="329184">
                 <a:tc>
@@ -11514,6 +11665,11 @@
                     </a:solidFill>
                   </a:tcPr>
                 </a:tc>
+                <a:extLst>
+                  <a:ext uri="{0D108BD9-81ED-4DB2-BD59-A6C34878D82A}">
+                    <a16:rowId xmlns:a16="http://schemas.microsoft.com/office/drawing/2014/main" val="10003"/>
+                  </a:ext>
+                </a:extLst>
               </a:tr>
               <a:tr h="329184">
                 <a:tc>
@@ -11606,6 +11762,11 @@
                     </a:solidFill>
                   </a:tcPr>
                 </a:tc>
+                <a:extLst>
+                  <a:ext uri="{0D108BD9-81ED-4DB2-BD59-A6C34878D82A}">
+                    <a16:rowId xmlns:a16="http://schemas.microsoft.com/office/drawing/2014/main" val="10004"/>
+                  </a:ext>
+                </a:extLst>
               </a:tr>
             </a:tbl>
           </a:graphicData>
@@ -11649,7 +11810,7 @@
           </a:fontRef>
         </p:style>
         <p:txBody>
-          <a:bodyPr rtlCol="0" anchor="ctr" wrap="square"/>
+          <a:bodyPr wrap="square" rtlCol="0" anchor="ctr"/>
           <a:lstStyle/>
           <a:p>
             <a:pPr algn="ctr">
@@ -11765,7 +11926,7 @@
 </file>
 
 <file path=ppt/slides/slide15.xml><?xml version="1.0" encoding="utf-8"?>
-<p:sld xmlns:a="http://schemas.openxmlformats.org/drawingml/2006/main" xmlns:p="http://schemas.openxmlformats.org/presentationml/2006/main" xmlns:r="http://schemas.openxmlformats.org/officeDocument/2006/relationships">
+<p:sld xmlns:a="http://schemas.openxmlformats.org/drawingml/2006/main" xmlns:r="http://schemas.openxmlformats.org/officeDocument/2006/relationships" xmlns:p="http://schemas.openxmlformats.org/presentationml/2006/main">
   <p:cSld>
     <p:spTree>
       <p:nvGrpSpPr>
@@ -11773,7 +11934,14 @@
         <p:cNvGrpSpPr/>
         <p:nvPr/>
       </p:nvGrpSpPr>
-      <p:grpSpPr/>
+      <p:grpSpPr>
+        <a:xfrm>
+          <a:off x="0" y="0"/>
+          <a:ext cx="0" cy="0"/>
+          <a:chOff x="0" y="0"/>
+          <a:chExt cx="0" cy="0"/>
+        </a:xfrm>
+      </p:grpSpPr>
       <p:sp>
         <p:nvSpPr>
           <p:cNvPr id="2" name="Rectangle 1"/>
@@ -11814,6 +11982,7 @@
           <a:lstStyle/>
           <a:p>
             <a:pPr algn="ctr"/>
+            <a:endParaRPr/>
           </a:p>
         </p:txBody>
       </p:sp>
@@ -11939,7 +12108,7 @@
           </a:fontRef>
         </p:style>
         <p:txBody>
-          <a:bodyPr rtlCol="0" anchor="ctr" wrap="square"/>
+          <a:bodyPr wrap="square" rtlCol="0" anchor="ctr"/>
           <a:lstStyle/>
           <a:p>
             <a:pPr algn="ctr">
@@ -11950,6 +12119,7 @@
                 <a:spcPts val="0"/>
               </a:spcAft>
             </a:pPr>
+            <a:endParaRPr/>
           </a:p>
         </p:txBody>
       </p:sp>
@@ -12033,7 +12203,7 @@
           </a:fontRef>
         </p:style>
         <p:txBody>
-          <a:bodyPr rtlCol="0" anchor="ctr" wrap="square"/>
+          <a:bodyPr wrap="square" rtlCol="0" anchor="ctr"/>
           <a:lstStyle/>
           <a:p>
             <a:pPr algn="ctr">
@@ -12044,6 +12214,7 @@
                 <a:spcPts val="0"/>
               </a:spcAft>
             </a:pPr>
+            <a:endParaRPr/>
           </a:p>
         </p:txBody>
       </p:sp>
@@ -12127,7 +12298,7 @@
           </a:fontRef>
         </p:style>
         <p:txBody>
-          <a:bodyPr rtlCol="0" anchor="ctr" wrap="square"/>
+          <a:bodyPr wrap="square" rtlCol="0" anchor="ctr"/>
           <a:lstStyle/>
           <a:p>
             <a:pPr algn="ctr">
@@ -12138,6 +12309,7 @@
                 <a:spcPts val="0"/>
               </a:spcAft>
             </a:pPr>
+            <a:endParaRPr/>
           </a:p>
         </p:txBody>
       </p:sp>
@@ -12221,7 +12393,7 @@
           </a:fontRef>
         </p:style>
         <p:txBody>
-          <a:bodyPr rtlCol="0" anchor="ctr" wrap="square"/>
+          <a:bodyPr wrap="square" rtlCol="0" anchor="ctr"/>
           <a:lstStyle/>
           <a:p>
             <a:pPr algn="ctr">
@@ -12232,6 +12404,7 @@
                 <a:spcPts val="0"/>
               </a:spcAft>
             </a:pPr>
+            <a:endParaRPr/>
           </a:p>
         </p:txBody>
       </p:sp>
@@ -12315,7 +12488,7 @@
           </a:fontRef>
         </p:style>
         <p:txBody>
-          <a:bodyPr rtlCol="0" anchor="ctr" wrap="square"/>
+          <a:bodyPr wrap="square" rtlCol="0" anchor="ctr"/>
           <a:lstStyle/>
           <a:p>
             <a:pPr algn="ctr">
@@ -12326,6 +12499,7 @@
                 <a:spcPts val="0"/>
               </a:spcAft>
             </a:pPr>
+            <a:endParaRPr/>
           </a:p>
         </p:txBody>
       </p:sp>
@@ -12432,9 +12606,27 @@
                 <a:tableStyleId>{5C22544A-7EE6-4342-B048-85BDC9FD1C3A}</a:tableStyleId>
               </a:tblPr>
               <a:tblGrid>
-                <a:gridCol w="1371600"/>
-                <a:gridCol w="1828800"/>
-                <a:gridCol w="2286000"/>
+                <a:gridCol w="1371600">
+                  <a:extLst>
+                    <a:ext uri="{9D8B030D-6E8A-4147-A177-3AD203B41FA5}">
+                      <a16:colId xmlns:a16="http://schemas.microsoft.com/office/drawing/2014/main" val="20000"/>
+                    </a:ext>
+                  </a:extLst>
+                </a:gridCol>
+                <a:gridCol w="1828800">
+                  <a:extLst>
+                    <a:ext uri="{9D8B030D-6E8A-4147-A177-3AD203B41FA5}">
+                      <a16:colId xmlns:a16="http://schemas.microsoft.com/office/drawing/2014/main" val="20001"/>
+                    </a:ext>
+                  </a:extLst>
+                </a:gridCol>
+                <a:gridCol w="2286000">
+                  <a:extLst>
+                    <a:ext uri="{9D8B030D-6E8A-4147-A177-3AD203B41FA5}">
+                      <a16:colId xmlns:a16="http://schemas.microsoft.com/office/drawing/2014/main" val="20002"/>
+                    </a:ext>
+                  </a:extLst>
+                </a:gridCol>
               </a:tblGrid>
               <a:tr h="457200">
                 <a:tc>
@@ -12527,6 +12719,11 @@
                     </a:solidFill>
                   </a:tcPr>
                 </a:tc>
+                <a:extLst>
+                  <a:ext uri="{0D108BD9-81ED-4DB2-BD59-A6C34878D82A}">
+                    <a16:rowId xmlns:a16="http://schemas.microsoft.com/office/drawing/2014/main" val="10000"/>
+                  </a:ext>
+                </a:extLst>
               </a:tr>
               <a:tr h="457200">
                 <a:tc>
@@ -12619,6 +12816,11 @@
                     </a:solidFill>
                   </a:tcPr>
                 </a:tc>
+                <a:extLst>
+                  <a:ext uri="{0D108BD9-81ED-4DB2-BD59-A6C34878D82A}">
+                    <a16:rowId xmlns:a16="http://schemas.microsoft.com/office/drawing/2014/main" val="10001"/>
+                  </a:ext>
+                </a:extLst>
               </a:tr>
               <a:tr h="457200">
                 <a:tc>
@@ -12711,6 +12913,11 @@
                     </a:solidFill>
                   </a:tcPr>
                 </a:tc>
+                <a:extLst>
+                  <a:ext uri="{0D108BD9-81ED-4DB2-BD59-A6C34878D82A}">
+                    <a16:rowId xmlns:a16="http://schemas.microsoft.com/office/drawing/2014/main" val="10002"/>
+                  </a:ext>
+                </a:extLst>
               </a:tr>
               <a:tr h="457200">
                 <a:tc>
@@ -12803,6 +13010,11 @@
                     </a:solidFill>
                   </a:tcPr>
                 </a:tc>
+                <a:extLst>
+                  <a:ext uri="{0D108BD9-81ED-4DB2-BD59-A6C34878D82A}">
+                    <a16:rowId xmlns:a16="http://schemas.microsoft.com/office/drawing/2014/main" val="10003"/>
+                  </a:ext>
+                </a:extLst>
               </a:tr>
             </a:tbl>
           </a:graphicData>
@@ -12846,7 +13058,7 @@
           </a:fontRef>
         </p:style>
         <p:txBody>
-          <a:bodyPr rtlCol="0" anchor="ctr" wrap="square"/>
+          <a:bodyPr wrap="square" rtlCol="0" anchor="ctr"/>
           <a:lstStyle/>
           <a:p>
             <a:pPr algn="l">
@@ -12962,7 +13174,7 @@
           </a:fontRef>
         </p:style>
         <p:txBody>
-          <a:bodyPr rtlCol="0" anchor="ctr" wrap="square"/>
+          <a:bodyPr wrap="square" rtlCol="0" anchor="ctr"/>
           <a:lstStyle/>
           <a:p>
             <a:pPr algn="ctr">
@@ -13029,6 +13241,7 @@
           <a:lstStyle/>
           <a:p>
             <a:pPr algn="ctr"/>
+            <a:endParaRPr/>
           </a:p>
         </p:txBody>
       </p:sp>
@@ -13070,7 +13283,7 @@
           </a:fontRef>
         </p:style>
         <p:txBody>
-          <a:bodyPr rtlCol="0" anchor="ctr" wrap="square"/>
+          <a:bodyPr wrap="square" rtlCol="0" anchor="ctr"/>
           <a:lstStyle/>
           <a:p>
             <a:pPr algn="ctr">
@@ -13137,6 +13350,7 @@
           <a:lstStyle/>
           <a:p>
             <a:pPr algn="ctr"/>
+            <a:endParaRPr/>
           </a:p>
         </p:txBody>
       </p:sp>
@@ -13178,7 +13392,7 @@
           </a:fontRef>
         </p:style>
         <p:txBody>
-          <a:bodyPr rtlCol="0" anchor="ctr" wrap="square"/>
+          <a:bodyPr wrap="square" rtlCol="0" anchor="ctr"/>
           <a:lstStyle/>
           <a:p>
             <a:pPr algn="ctr">
@@ -13245,6 +13459,7 @@
           <a:lstStyle/>
           <a:p>
             <a:pPr algn="ctr"/>
+            <a:endParaRPr/>
           </a:p>
         </p:txBody>
       </p:sp>
@@ -13286,7 +13501,7 @@
           </a:fontRef>
         </p:style>
         <p:txBody>
-          <a:bodyPr rtlCol="0" anchor="ctr" wrap="square"/>
+          <a:bodyPr wrap="square" rtlCol="0" anchor="ctr"/>
           <a:lstStyle/>
           <a:p>
             <a:pPr algn="ctr">
@@ -13353,6 +13568,7 @@
           <a:lstStyle/>
           <a:p>
             <a:pPr algn="ctr"/>
+            <a:endParaRPr/>
           </a:p>
         </p:txBody>
       </p:sp>
@@ -13394,7 +13610,7 @@
           </a:fontRef>
         </p:style>
         <p:txBody>
-          <a:bodyPr rtlCol="0" anchor="ctr" wrap="square"/>
+          <a:bodyPr wrap="square" rtlCol="0" anchor="ctr"/>
           <a:lstStyle/>
           <a:p>
             <a:pPr algn="ctr">
@@ -13556,7 +13772,7 @@
 </file>
 
 <file path=ppt/slides/slide16.xml><?xml version="1.0" encoding="utf-8"?>
-<p:sld xmlns:a="http://schemas.openxmlformats.org/drawingml/2006/main" xmlns:p="http://schemas.openxmlformats.org/presentationml/2006/main" xmlns:r="http://schemas.openxmlformats.org/officeDocument/2006/relationships">
+<p:sld xmlns:a="http://schemas.openxmlformats.org/drawingml/2006/main" xmlns:r="http://schemas.openxmlformats.org/officeDocument/2006/relationships" xmlns:p="http://schemas.openxmlformats.org/presentationml/2006/main">
   <p:cSld>
     <p:spTree>
       <p:nvGrpSpPr>
@@ -13564,7 +13780,14 @@
         <p:cNvGrpSpPr/>
         <p:nvPr/>
       </p:nvGrpSpPr>
-      <p:grpSpPr/>
+      <p:grpSpPr>
+        <a:xfrm>
+          <a:off x="0" y="0"/>
+          <a:ext cx="0" cy="0"/>
+          <a:chOff x="0" y="0"/>
+          <a:chExt cx="0" cy="0"/>
+        </a:xfrm>
+      </p:grpSpPr>
       <p:sp>
         <p:nvSpPr>
           <p:cNvPr id="2" name="Rectangle 1"/>
@@ -13605,6 +13828,7 @@
           <a:lstStyle/>
           <a:p>
             <a:pPr algn="ctr"/>
+            <a:endParaRPr/>
           </a:p>
         </p:txBody>
       </p:sp>
@@ -13730,7 +13954,7 @@
           </a:fontRef>
         </p:style>
         <p:txBody>
-          <a:bodyPr rtlCol="0" anchor="ctr" wrap="square"/>
+          <a:bodyPr wrap="square" rtlCol="0" anchor="ctr"/>
           <a:lstStyle/>
           <a:p>
             <a:pPr algn="ctr">
@@ -13741,6 +13965,7 @@
                 <a:spcPts val="0"/>
               </a:spcAft>
             </a:pPr>
+            <a:endParaRPr/>
           </a:p>
         </p:txBody>
       </p:sp>
@@ -13782,7 +14007,7 @@
           </a:fontRef>
         </p:style>
         <p:txBody>
-          <a:bodyPr rtlCol="0" anchor="ctr" wrap="square"/>
+          <a:bodyPr wrap="square" rtlCol="0" anchor="ctr"/>
           <a:lstStyle/>
           <a:p>
             <a:pPr algn="ctr">
@@ -13793,6 +14018,7 @@
                 <a:spcPts val="0"/>
               </a:spcAft>
             </a:pPr>
+            <a:endParaRPr/>
           </a:p>
         </p:txBody>
       </p:sp>
@@ -13834,7 +14060,7 @@
           </a:fontRef>
         </p:style>
         <p:txBody>
-          <a:bodyPr rtlCol="0" anchor="ctr" wrap="square"/>
+          <a:bodyPr wrap="square" rtlCol="0" anchor="ctr"/>
           <a:lstStyle/>
           <a:p>
             <a:pPr algn="ctr">
@@ -13845,6 +14071,7 @@
                 <a:spcPts val="0"/>
               </a:spcAft>
             </a:pPr>
+            <a:endParaRPr/>
           </a:p>
         </p:txBody>
       </p:sp>
@@ -13970,7 +14197,7 @@
           </a:fontRef>
         </p:style>
         <p:txBody>
-          <a:bodyPr rtlCol="0" anchor="ctr" wrap="square"/>
+          <a:bodyPr wrap="square" rtlCol="0" anchor="ctr"/>
           <a:lstStyle/>
           <a:p>
             <a:pPr algn="ctr">
@@ -13981,6 +14208,7 @@
                 <a:spcPts val="0"/>
               </a:spcAft>
             </a:pPr>
+            <a:endParaRPr/>
           </a:p>
         </p:txBody>
       </p:sp>
@@ -14022,7 +14250,7 @@
           </a:fontRef>
         </p:style>
         <p:txBody>
-          <a:bodyPr rtlCol="0" anchor="ctr" wrap="square"/>
+          <a:bodyPr wrap="square" rtlCol="0" anchor="ctr"/>
           <a:lstStyle/>
           <a:p>
             <a:pPr algn="ctr">
@@ -14033,6 +14261,7 @@
                 <a:spcPts val="0"/>
               </a:spcAft>
             </a:pPr>
+            <a:endParaRPr/>
           </a:p>
         </p:txBody>
       </p:sp>
@@ -14074,7 +14303,7 @@
           </a:fontRef>
         </p:style>
         <p:txBody>
-          <a:bodyPr rtlCol="0" anchor="ctr" wrap="square"/>
+          <a:bodyPr wrap="square" rtlCol="0" anchor="ctr"/>
           <a:lstStyle/>
           <a:p>
             <a:pPr algn="ctr">
@@ -14085,6 +14314,7 @@
                 <a:spcPts val="0"/>
               </a:spcAft>
             </a:pPr>
+            <a:endParaRPr/>
           </a:p>
         </p:txBody>
       </p:sp>
@@ -14126,7 +14356,7 @@
           </a:fontRef>
         </p:style>
         <p:txBody>
-          <a:bodyPr rtlCol="0" anchor="ctr" wrap="square"/>
+          <a:bodyPr wrap="square" rtlCol="0" anchor="ctr"/>
           <a:lstStyle/>
           <a:p>
             <a:pPr algn="ctr">
@@ -14137,6 +14367,7 @@
                 <a:spcPts val="0"/>
               </a:spcAft>
             </a:pPr>
+            <a:endParaRPr/>
           </a:p>
         </p:txBody>
       </p:sp>
@@ -14262,7 +14493,7 @@
           </a:fontRef>
         </p:style>
         <p:txBody>
-          <a:bodyPr rtlCol="0" anchor="ctr" wrap="square"/>
+          <a:bodyPr wrap="square" rtlCol="0" anchor="ctr"/>
           <a:lstStyle/>
           <a:p>
             <a:pPr algn="ctr">
@@ -14273,6 +14504,7 @@
                 <a:spcPts val="0"/>
               </a:spcAft>
             </a:pPr>
+            <a:endParaRPr/>
           </a:p>
         </p:txBody>
       </p:sp>
@@ -14314,7 +14546,7 @@
           </a:fontRef>
         </p:style>
         <p:txBody>
-          <a:bodyPr rtlCol="0" anchor="ctr" wrap="square"/>
+          <a:bodyPr wrap="square" rtlCol="0" anchor="ctr"/>
           <a:lstStyle/>
           <a:p>
             <a:pPr algn="ctr">
@@ -14325,6 +14557,7 @@
                 <a:spcPts val="0"/>
               </a:spcAft>
             </a:pPr>
+            <a:endParaRPr/>
           </a:p>
         </p:txBody>
       </p:sp>
@@ -14366,7 +14599,7 @@
           </a:fontRef>
         </p:style>
         <p:txBody>
-          <a:bodyPr rtlCol="0" anchor="ctr" wrap="square"/>
+          <a:bodyPr wrap="square" rtlCol="0" anchor="ctr"/>
           <a:lstStyle/>
           <a:p>
             <a:pPr algn="ctr">
@@ -14377,6 +14610,7 @@
                 <a:spcPts val="0"/>
               </a:spcAft>
             </a:pPr>
+            <a:endParaRPr/>
           </a:p>
         </p:txBody>
       </p:sp>
@@ -14418,7 +14652,7 @@
           </a:fontRef>
         </p:style>
         <p:txBody>
-          <a:bodyPr rtlCol="0" anchor="ctr" wrap="square"/>
+          <a:bodyPr wrap="square" rtlCol="0" anchor="ctr"/>
           <a:lstStyle/>
           <a:p>
             <a:pPr algn="ctr">
@@ -14429,6 +14663,7 @@
                 <a:spcPts val="0"/>
               </a:spcAft>
             </a:pPr>
+            <a:endParaRPr/>
           </a:p>
         </p:txBody>
       </p:sp>
@@ -14470,7 +14705,7 @@
           </a:fontRef>
         </p:style>
         <p:txBody>
-          <a:bodyPr rtlCol="0" anchor="ctr" wrap="square"/>
+          <a:bodyPr wrap="square" rtlCol="0" anchor="ctr"/>
           <a:lstStyle/>
           <a:p>
             <a:pPr algn="ctr">
@@ -14481,6 +14716,7 @@
                 <a:spcPts val="0"/>
               </a:spcAft>
             </a:pPr>
+            <a:endParaRPr/>
           </a:p>
         </p:txBody>
       </p:sp>
@@ -14606,7 +14842,7 @@
           </a:fontRef>
         </p:style>
         <p:txBody>
-          <a:bodyPr rtlCol="0" anchor="ctr" wrap="square"/>
+          <a:bodyPr wrap="square" rtlCol="0" anchor="ctr"/>
           <a:lstStyle/>
           <a:p>
             <a:pPr algn="ctr">
@@ -14617,6 +14853,7 @@
                 <a:spcPts val="0"/>
               </a:spcAft>
             </a:pPr>
+            <a:endParaRPr/>
           </a:p>
         </p:txBody>
       </p:sp>
@@ -14658,7 +14895,7 @@
           </a:fontRef>
         </p:style>
         <p:txBody>
-          <a:bodyPr rtlCol="0" anchor="ctr" wrap="square"/>
+          <a:bodyPr wrap="square" rtlCol="0" anchor="ctr"/>
           <a:lstStyle/>
           <a:p>
             <a:pPr algn="ctr">
@@ -14669,6 +14906,7 @@
                 <a:spcPts val="0"/>
               </a:spcAft>
             </a:pPr>
+            <a:endParaRPr/>
           </a:p>
         </p:txBody>
       </p:sp>
@@ -14710,7 +14948,7 @@
           </a:fontRef>
         </p:style>
         <p:txBody>
-          <a:bodyPr rtlCol="0" anchor="ctr" wrap="square"/>
+          <a:bodyPr wrap="square" rtlCol="0" anchor="ctr"/>
           <a:lstStyle/>
           <a:p>
             <a:pPr algn="ctr">
@@ -14721,6 +14959,7 @@
                 <a:spcPts val="0"/>
               </a:spcAft>
             </a:pPr>
+            <a:endParaRPr/>
           </a:p>
         </p:txBody>
       </p:sp>
@@ -14762,7 +15001,7 @@
           </a:fontRef>
         </p:style>
         <p:txBody>
-          <a:bodyPr rtlCol="0" anchor="ctr" wrap="square"/>
+          <a:bodyPr wrap="square" rtlCol="0" anchor="ctr"/>
           <a:lstStyle/>
           <a:p>
             <a:pPr algn="ctr">
@@ -14773,6 +15012,7 @@
                 <a:spcPts val="0"/>
               </a:spcAft>
             </a:pPr>
+            <a:endParaRPr/>
           </a:p>
         </p:txBody>
       </p:sp>
@@ -14814,7 +15054,7 @@
           </a:fontRef>
         </p:style>
         <p:txBody>
-          <a:bodyPr rtlCol="0" anchor="ctr" wrap="square"/>
+          <a:bodyPr wrap="square" rtlCol="0" anchor="ctr"/>
           <a:lstStyle/>
           <a:p>
             <a:pPr algn="ctr">
@@ -14825,6 +15065,7 @@
                 <a:spcPts val="0"/>
               </a:spcAft>
             </a:pPr>
+            <a:endParaRPr/>
           </a:p>
         </p:txBody>
       </p:sp>
@@ -14950,7 +15191,7 @@
           </a:fontRef>
         </p:style>
         <p:txBody>
-          <a:bodyPr rtlCol="0" anchor="ctr" wrap="square"/>
+          <a:bodyPr wrap="square" rtlCol="0" anchor="ctr"/>
           <a:lstStyle/>
           <a:p>
             <a:pPr algn="ctr">
@@ -14961,6 +15202,7 @@
                 <a:spcPts val="0"/>
               </a:spcAft>
             </a:pPr>
+            <a:endParaRPr/>
           </a:p>
         </p:txBody>
       </p:sp>
@@ -15002,7 +15244,7 @@
           </a:fontRef>
         </p:style>
         <p:txBody>
-          <a:bodyPr rtlCol="0" anchor="ctr" wrap="square"/>
+          <a:bodyPr wrap="square" rtlCol="0" anchor="ctr"/>
           <a:lstStyle/>
           <a:p>
             <a:pPr algn="ctr">
@@ -15013,6 +15255,7 @@
                 <a:spcPts val="0"/>
               </a:spcAft>
             </a:pPr>
+            <a:endParaRPr/>
           </a:p>
         </p:txBody>
       </p:sp>
@@ -15054,7 +15297,7 @@
           </a:fontRef>
         </p:style>
         <p:txBody>
-          <a:bodyPr rtlCol="0" anchor="ctr" wrap="square"/>
+          <a:bodyPr wrap="square" rtlCol="0" anchor="ctr"/>
           <a:lstStyle/>
           <a:p>
             <a:pPr algn="ctr">
@@ -15065,6 +15308,7 @@
                 <a:spcPts val="0"/>
               </a:spcAft>
             </a:pPr>
+            <a:endParaRPr/>
           </a:p>
         </p:txBody>
       </p:sp>
@@ -15106,7 +15350,7 @@
           </a:fontRef>
         </p:style>
         <p:txBody>
-          <a:bodyPr rtlCol="0" anchor="ctr" wrap="square"/>
+          <a:bodyPr wrap="square" rtlCol="0" anchor="ctr"/>
           <a:lstStyle/>
           <a:p>
             <a:pPr algn="ctr">
@@ -15117,6 +15361,7 @@
                 <a:spcPts val="0"/>
               </a:spcAft>
             </a:pPr>
+            <a:endParaRPr/>
           </a:p>
         </p:txBody>
       </p:sp>
@@ -15158,7 +15403,7 @@
           </a:fontRef>
         </p:style>
         <p:txBody>
-          <a:bodyPr rtlCol="0" anchor="ctr" wrap="square"/>
+          <a:bodyPr wrap="square" rtlCol="0" anchor="ctr"/>
           <a:lstStyle/>
           <a:p>
             <a:pPr algn="ctr">
@@ -15169,6 +15414,7 @@
                 <a:spcPts val="0"/>
               </a:spcAft>
             </a:pPr>
+            <a:endParaRPr/>
           </a:p>
         </p:txBody>
       </p:sp>
@@ -15294,7 +15540,7 @@
           </a:fontRef>
         </p:style>
         <p:txBody>
-          <a:bodyPr rtlCol="0" anchor="ctr" wrap="square"/>
+          <a:bodyPr wrap="square" rtlCol="0" anchor="ctr"/>
           <a:lstStyle/>
           <a:p>
             <a:pPr algn="ctr">
@@ -15305,6 +15551,7 @@
                 <a:spcPts val="0"/>
               </a:spcAft>
             </a:pPr>
+            <a:endParaRPr/>
           </a:p>
         </p:txBody>
       </p:sp>
@@ -15346,7 +15593,7 @@
           </a:fontRef>
         </p:style>
         <p:txBody>
-          <a:bodyPr rtlCol="0" anchor="ctr" wrap="square"/>
+          <a:bodyPr wrap="square" rtlCol="0" anchor="ctr"/>
           <a:lstStyle/>
           <a:p>
             <a:pPr algn="ctr">
@@ -15357,6 +15604,7 @@
                 <a:spcPts val="0"/>
               </a:spcAft>
             </a:pPr>
+            <a:endParaRPr/>
           </a:p>
         </p:txBody>
       </p:sp>
@@ -15398,7 +15646,7 @@
           </a:fontRef>
         </p:style>
         <p:txBody>
-          <a:bodyPr rtlCol="0" anchor="ctr" wrap="square"/>
+          <a:bodyPr wrap="square" rtlCol="0" anchor="ctr"/>
           <a:lstStyle/>
           <a:p>
             <a:pPr algn="ctr">
@@ -15409,6 +15657,7 @@
                 <a:spcPts val="0"/>
               </a:spcAft>
             </a:pPr>
+            <a:endParaRPr/>
           </a:p>
         </p:txBody>
       </p:sp>
@@ -15450,7 +15699,7 @@
           </a:fontRef>
         </p:style>
         <p:txBody>
-          <a:bodyPr rtlCol="0" anchor="ctr" wrap="square"/>
+          <a:bodyPr wrap="square" rtlCol="0" anchor="ctr"/>
           <a:lstStyle/>
           <a:p>
             <a:pPr algn="ctr">
@@ -15461,6 +15710,7 @@
                 <a:spcPts val="0"/>
               </a:spcAft>
             </a:pPr>
+            <a:endParaRPr/>
           </a:p>
         </p:txBody>
       </p:sp>
@@ -15502,7 +15752,7 @@
           </a:fontRef>
         </p:style>
         <p:txBody>
-          <a:bodyPr rtlCol="0" anchor="ctr" wrap="square"/>
+          <a:bodyPr wrap="square" rtlCol="0" anchor="ctr"/>
           <a:lstStyle/>
           <a:p>
             <a:pPr algn="ctr">
@@ -15513,6 +15763,7 @@
                 <a:spcPts val="0"/>
               </a:spcAft>
             </a:pPr>
+            <a:endParaRPr/>
           </a:p>
         </p:txBody>
       </p:sp>
@@ -15638,7 +15889,7 @@
           </a:fontRef>
         </p:style>
         <p:txBody>
-          <a:bodyPr rtlCol="0" anchor="ctr" wrap="square"/>
+          <a:bodyPr wrap="square" rtlCol="0" anchor="ctr"/>
           <a:lstStyle/>
           <a:p>
             <a:pPr algn="ctr">
@@ -15649,6 +15900,7 @@
                 <a:spcPts val="0"/>
               </a:spcAft>
             </a:pPr>
+            <a:endParaRPr/>
           </a:p>
         </p:txBody>
       </p:sp>
@@ -15690,7 +15942,7 @@
           </a:fontRef>
         </p:style>
         <p:txBody>
-          <a:bodyPr rtlCol="0" anchor="ctr" wrap="square"/>
+          <a:bodyPr wrap="square" rtlCol="0" anchor="ctr"/>
           <a:lstStyle/>
           <a:p>
             <a:pPr algn="ctr">
@@ -15701,6 +15953,7 @@
                 <a:spcPts val="0"/>
               </a:spcAft>
             </a:pPr>
+            <a:endParaRPr/>
           </a:p>
         </p:txBody>
       </p:sp>
@@ -15742,7 +15995,7 @@
           </a:fontRef>
         </p:style>
         <p:txBody>
-          <a:bodyPr rtlCol="0" anchor="ctr" wrap="square"/>
+          <a:bodyPr wrap="square" rtlCol="0" anchor="ctr"/>
           <a:lstStyle/>
           <a:p>
             <a:pPr algn="ctr">
@@ -15753,6 +16006,7 @@
                 <a:spcPts val="0"/>
               </a:spcAft>
             </a:pPr>
+            <a:endParaRPr/>
           </a:p>
         </p:txBody>
       </p:sp>
@@ -15794,7 +16048,7 @@
           </a:fontRef>
         </p:style>
         <p:txBody>
-          <a:bodyPr rtlCol="0" anchor="ctr" wrap="square"/>
+          <a:bodyPr wrap="square" rtlCol="0" anchor="ctr"/>
           <a:lstStyle/>
           <a:p>
             <a:pPr algn="ctr">
@@ -15805,6 +16059,7 @@
                 <a:spcPts val="0"/>
               </a:spcAft>
             </a:pPr>
+            <a:endParaRPr/>
           </a:p>
         </p:txBody>
       </p:sp>
@@ -15846,7 +16101,7 @@
           </a:fontRef>
         </p:style>
         <p:txBody>
-          <a:bodyPr rtlCol="0" anchor="ctr" wrap="square"/>
+          <a:bodyPr wrap="square" rtlCol="0" anchor="ctr"/>
           <a:lstStyle/>
           <a:p>
             <a:pPr algn="ctr">
@@ -15857,6 +16112,7 @@
                 <a:spcPts val="0"/>
               </a:spcAft>
             </a:pPr>
+            <a:endParaRPr/>
           </a:p>
         </p:txBody>
       </p:sp>
@@ -15982,7 +16238,7 @@
           </a:fontRef>
         </p:style>
         <p:txBody>
-          <a:bodyPr rtlCol="0" anchor="ctr" wrap="square"/>
+          <a:bodyPr wrap="square" rtlCol="0" anchor="ctr"/>
           <a:lstStyle/>
           <a:p>
             <a:pPr algn="ctr">
@@ -15993,6 +16249,7 @@
                 <a:spcPts val="0"/>
               </a:spcAft>
             </a:pPr>
+            <a:endParaRPr/>
           </a:p>
         </p:txBody>
       </p:sp>
@@ -16034,7 +16291,7 @@
           </a:fontRef>
         </p:style>
         <p:txBody>
-          <a:bodyPr rtlCol="0" anchor="ctr" wrap="square"/>
+          <a:bodyPr wrap="square" rtlCol="0" anchor="ctr"/>
           <a:lstStyle/>
           <a:p>
             <a:pPr algn="ctr">
@@ -16045,6 +16302,7 @@
                 <a:spcPts val="0"/>
               </a:spcAft>
             </a:pPr>
+            <a:endParaRPr/>
           </a:p>
         </p:txBody>
       </p:sp>
@@ -16086,7 +16344,7 @@
           </a:fontRef>
         </p:style>
         <p:txBody>
-          <a:bodyPr rtlCol="0" anchor="ctr" wrap="square"/>
+          <a:bodyPr wrap="square" rtlCol="0" anchor="ctr"/>
           <a:lstStyle/>
           <a:p>
             <a:pPr algn="ctr">
@@ -16097,6 +16355,7 @@
                 <a:spcPts val="0"/>
               </a:spcAft>
             </a:pPr>
+            <a:endParaRPr/>
           </a:p>
         </p:txBody>
       </p:sp>
@@ -16138,7 +16397,7 @@
           </a:fontRef>
         </p:style>
         <p:txBody>
-          <a:bodyPr rtlCol="0" anchor="ctr" wrap="square"/>
+          <a:bodyPr wrap="square" rtlCol="0" anchor="ctr"/>
           <a:lstStyle/>
           <a:p>
             <a:pPr algn="ctr">
@@ -16149,6 +16408,7 @@
                 <a:spcPts val="0"/>
               </a:spcAft>
             </a:pPr>
+            <a:endParaRPr/>
           </a:p>
         </p:txBody>
       </p:sp>
@@ -16190,7 +16450,7 @@
           </a:fontRef>
         </p:style>
         <p:txBody>
-          <a:bodyPr rtlCol="0" anchor="ctr" wrap="square"/>
+          <a:bodyPr wrap="square" rtlCol="0" anchor="ctr"/>
           <a:lstStyle/>
           <a:p>
             <a:pPr algn="ctr">
@@ -16201,6 +16461,7 @@
                 <a:spcPts val="0"/>
               </a:spcAft>
             </a:pPr>
+            <a:endParaRPr/>
           </a:p>
         </p:txBody>
       </p:sp>
@@ -16326,7 +16587,7 @@
           </a:fontRef>
         </p:style>
         <p:txBody>
-          <a:bodyPr rtlCol="0" anchor="ctr" wrap="square"/>
+          <a:bodyPr wrap="square" rtlCol="0" anchor="ctr"/>
           <a:lstStyle/>
           <a:p>
             <a:pPr algn="ctr">
@@ -16337,6 +16598,7 @@
                 <a:spcPts val="0"/>
               </a:spcAft>
             </a:pPr>
+            <a:endParaRPr/>
           </a:p>
         </p:txBody>
       </p:sp>
@@ -16378,7 +16640,7 @@
           </a:fontRef>
         </p:style>
         <p:txBody>
-          <a:bodyPr rtlCol="0" anchor="ctr" wrap="square"/>
+          <a:bodyPr wrap="square" rtlCol="0" anchor="ctr"/>
           <a:lstStyle/>
           <a:p>
             <a:pPr algn="ctr">
@@ -16389,6 +16651,7 @@
                 <a:spcPts val="0"/>
               </a:spcAft>
             </a:pPr>
+            <a:endParaRPr/>
           </a:p>
         </p:txBody>
       </p:sp>
@@ -16430,7 +16693,7 @@
           </a:fontRef>
         </p:style>
         <p:txBody>
-          <a:bodyPr rtlCol="0" anchor="ctr" wrap="square"/>
+          <a:bodyPr wrap="square" rtlCol="0" anchor="ctr"/>
           <a:lstStyle/>
           <a:p>
             <a:pPr algn="ctr">
@@ -16441,6 +16704,7 @@
                 <a:spcPts val="0"/>
               </a:spcAft>
             </a:pPr>
+            <a:endParaRPr/>
           </a:p>
         </p:txBody>
       </p:sp>
@@ -16482,7 +16746,7 @@
           </a:fontRef>
         </p:style>
         <p:txBody>
-          <a:bodyPr rtlCol="0" anchor="ctr" wrap="square"/>
+          <a:bodyPr wrap="square" rtlCol="0" anchor="ctr"/>
           <a:lstStyle/>
           <a:p>
             <a:pPr algn="ctr">
@@ -16493,6 +16757,7 @@
                 <a:spcPts val="0"/>
               </a:spcAft>
             </a:pPr>
+            <a:endParaRPr/>
           </a:p>
         </p:txBody>
       </p:sp>
@@ -16534,7 +16799,7 @@
           </a:fontRef>
         </p:style>
         <p:txBody>
-          <a:bodyPr rtlCol="0" anchor="ctr" wrap="square"/>
+          <a:bodyPr wrap="square" rtlCol="0" anchor="ctr"/>
           <a:lstStyle/>
           <a:p>
             <a:pPr algn="ctr">
@@ -16545,6 +16810,7 @@
                 <a:spcPts val="0"/>
               </a:spcAft>
             </a:pPr>
+            <a:endParaRPr/>
           </a:p>
         </p:txBody>
       </p:sp>
@@ -16670,7 +16936,7 @@
           </a:fontRef>
         </p:style>
         <p:txBody>
-          <a:bodyPr rtlCol="0" anchor="ctr" wrap="square"/>
+          <a:bodyPr wrap="square" rtlCol="0" anchor="ctr"/>
           <a:lstStyle/>
           <a:p>
             <a:pPr algn="ctr">
@@ -16681,6 +16947,7 @@
                 <a:spcPts val="0"/>
               </a:spcAft>
             </a:pPr>
+            <a:endParaRPr/>
           </a:p>
         </p:txBody>
       </p:sp>
@@ -16722,7 +16989,7 @@
           </a:fontRef>
         </p:style>
         <p:txBody>
-          <a:bodyPr rtlCol="0" anchor="ctr" wrap="square"/>
+          <a:bodyPr wrap="square" rtlCol="0" anchor="ctr"/>
           <a:lstStyle/>
           <a:p>
             <a:pPr algn="ctr">
@@ -16733,6 +17000,7 @@
                 <a:spcPts val="0"/>
               </a:spcAft>
             </a:pPr>
+            <a:endParaRPr/>
           </a:p>
         </p:txBody>
       </p:sp>
@@ -16774,7 +17042,7 @@
           </a:fontRef>
         </p:style>
         <p:txBody>
-          <a:bodyPr rtlCol="0" anchor="ctr" wrap="square"/>
+          <a:bodyPr wrap="square" rtlCol="0" anchor="ctr"/>
           <a:lstStyle/>
           <a:p>
             <a:pPr algn="ctr">
@@ -16785,6 +17053,7 @@
                 <a:spcPts val="0"/>
               </a:spcAft>
             </a:pPr>
+            <a:endParaRPr/>
           </a:p>
         </p:txBody>
       </p:sp>
@@ -16826,7 +17095,7 @@
           </a:fontRef>
         </p:style>
         <p:txBody>
-          <a:bodyPr rtlCol="0" anchor="ctr" wrap="square"/>
+          <a:bodyPr wrap="square" rtlCol="0" anchor="ctr"/>
           <a:lstStyle/>
           <a:p>
             <a:pPr algn="ctr">
@@ -16837,6 +17106,7 @@
                 <a:spcPts val="0"/>
               </a:spcAft>
             </a:pPr>
+            <a:endParaRPr/>
           </a:p>
         </p:txBody>
       </p:sp>
@@ -16878,7 +17148,7 @@
           </a:fontRef>
         </p:style>
         <p:txBody>
-          <a:bodyPr rtlCol="0" anchor="ctr" wrap="square"/>
+          <a:bodyPr wrap="square" rtlCol="0" anchor="ctr"/>
           <a:lstStyle/>
           <a:p>
             <a:pPr algn="ctr">
@@ -16889,6 +17159,7 @@
                 <a:spcPts val="0"/>
               </a:spcAft>
             </a:pPr>
+            <a:endParaRPr/>
           </a:p>
         </p:txBody>
       </p:sp>
@@ -17014,7 +17285,7 @@
           </a:fontRef>
         </p:style>
         <p:txBody>
-          <a:bodyPr rtlCol="0" anchor="ctr" wrap="square"/>
+          <a:bodyPr wrap="square" rtlCol="0" anchor="ctr"/>
           <a:lstStyle/>
           <a:p>
             <a:pPr algn="ctr">
@@ -17025,6 +17296,7 @@
                 <a:spcPts val="0"/>
               </a:spcAft>
             </a:pPr>
+            <a:endParaRPr/>
           </a:p>
         </p:txBody>
       </p:sp>
@@ -17108,7 +17380,7 @@
           </a:fontRef>
         </p:style>
         <p:txBody>
-          <a:bodyPr rtlCol="0" anchor="ctr" wrap="square"/>
+          <a:bodyPr wrap="square" rtlCol="0" anchor="ctr"/>
           <a:lstStyle/>
           <a:p>
             <a:pPr algn="ctr">
@@ -17119,6 +17391,7 @@
                 <a:spcPts val="0"/>
               </a:spcAft>
             </a:pPr>
+            <a:endParaRPr/>
           </a:p>
         </p:txBody>
       </p:sp>
@@ -17202,7 +17475,7 @@
           </a:fontRef>
         </p:style>
         <p:txBody>
-          <a:bodyPr rtlCol="0" anchor="ctr" wrap="square"/>
+          <a:bodyPr wrap="square" rtlCol="0" anchor="ctr"/>
           <a:lstStyle/>
           <a:p>
             <a:pPr algn="ctr">
@@ -17213,6 +17486,7 @@
                 <a:spcPts val="0"/>
               </a:spcAft>
             </a:pPr>
+            <a:endParaRPr/>
           </a:p>
         </p:txBody>
       </p:sp>
@@ -17296,7 +17570,7 @@
           </a:fontRef>
         </p:style>
         <p:txBody>
-          <a:bodyPr rtlCol="0" anchor="ctr" wrap="square"/>
+          <a:bodyPr wrap="square" rtlCol="0" anchor="ctr"/>
           <a:lstStyle/>
           <a:p>
             <a:pPr algn="ctr">
@@ -17307,6 +17581,7 @@
                 <a:spcPts val="0"/>
               </a:spcAft>
             </a:pPr>
+            <a:endParaRPr/>
           </a:p>
         </p:txBody>
       </p:sp>
@@ -17390,7 +17665,7 @@
           </a:fontRef>
         </p:style>
         <p:txBody>
-          <a:bodyPr rtlCol="0" anchor="ctr" wrap="square"/>
+          <a:bodyPr wrap="square" rtlCol="0" anchor="ctr"/>
           <a:lstStyle/>
           <a:p>
             <a:pPr algn="ctr">
@@ -17401,6 +17676,7 @@
                 <a:spcPts val="0"/>
               </a:spcAft>
             </a:pPr>
+            <a:endParaRPr/>
           </a:p>
         </p:txBody>
       </p:sp>
@@ -17580,7 +17856,7 @@
         </p:nvSpPr>
         <p:spPr>
           <a:xfrm>
-            <a:off x="7315200" y="5577840"/>
+            <a:off x="6903720" y="5731769"/>
             <a:ext cx="4389120" cy="640080"/>
           </a:xfrm>
           <a:prstGeom prst="roundRect">
@@ -17610,7 +17886,7 @@
           </a:fontRef>
         </p:style>
         <p:txBody>
-          <a:bodyPr rtlCol="0" anchor="ctr" wrap="square"/>
+          <a:bodyPr wrap="square" rtlCol="0" anchor="ctr"/>
           <a:lstStyle/>
           <a:p>
             <a:pPr algn="ctr">
@@ -17726,7 +18002,7 @@
 </file>
 
 <file path=ppt/slides/slide17.xml><?xml version="1.0" encoding="utf-8"?>
-<p:sld xmlns:a="http://schemas.openxmlformats.org/drawingml/2006/main" xmlns:p="http://schemas.openxmlformats.org/presentationml/2006/main" xmlns:r="http://schemas.openxmlformats.org/officeDocument/2006/relationships">
+<p:sld xmlns:a="http://schemas.openxmlformats.org/drawingml/2006/main" xmlns:r="http://schemas.openxmlformats.org/officeDocument/2006/relationships" xmlns:p="http://schemas.openxmlformats.org/presentationml/2006/main">
   <p:cSld>
     <p:spTree>
       <p:nvGrpSpPr>
@@ -17734,7 +18010,14 @@
         <p:cNvGrpSpPr/>
         <p:nvPr/>
       </p:nvGrpSpPr>
-      <p:grpSpPr/>
+      <p:grpSpPr>
+        <a:xfrm>
+          <a:off x="0" y="0"/>
+          <a:ext cx="0" cy="0"/>
+          <a:chOff x="0" y="0"/>
+          <a:chExt cx="0" cy="0"/>
+        </a:xfrm>
+      </p:grpSpPr>
       <p:sp>
         <p:nvSpPr>
           <p:cNvPr id="2" name="Rectangle 1"/>
@@ -17775,6 +18058,7 @@
           <a:lstStyle/>
           <a:p>
             <a:pPr algn="ctr"/>
+            <a:endParaRPr/>
           </a:p>
         </p:txBody>
       </p:sp>
@@ -17858,7 +18142,7 @@
           </a:fontRef>
         </p:style>
         <p:txBody>
-          <a:bodyPr rtlCol="0" anchor="ctr" wrap="square"/>
+          <a:bodyPr wrap="square" rtlCol="0" anchor="ctr"/>
           <a:lstStyle/>
           <a:p>
             <a:pPr algn="ctr">
@@ -18423,7 +18707,7 @@
           </a:fontRef>
         </p:style>
         <p:txBody>
-          <a:bodyPr rtlCol="0" anchor="ctr" wrap="square"/>
+          <a:bodyPr wrap="square" rtlCol="0" anchor="ctr"/>
           <a:lstStyle/>
           <a:p>
             <a:pPr algn="ctr">
@@ -18652,7 +18936,7 @@
           </a:fontRef>
         </p:style>
         <p:txBody>
-          <a:bodyPr rtlCol="0" anchor="ctr" wrap="square"/>
+          <a:bodyPr wrap="square" rtlCol="0" anchor="ctr"/>
           <a:lstStyle/>
           <a:p>
             <a:pPr algn="ctr">
@@ -18839,7 +19123,7 @@
           </a:fontRef>
         </p:style>
         <p:txBody>
-          <a:bodyPr rtlCol="0" anchor="ctr" wrap="square"/>
+          <a:bodyPr wrap="square" rtlCol="0" anchor="ctr"/>
           <a:lstStyle/>
           <a:p>
             <a:pPr algn="ctr">
@@ -19404,7 +19688,7 @@
           </a:fontRef>
         </p:style>
         <p:txBody>
-          <a:bodyPr rtlCol="0" anchor="ctr" wrap="square"/>
+          <a:bodyPr wrap="square" rtlCol="0" anchor="ctr"/>
           <a:lstStyle/>
           <a:p>
             <a:pPr algn="ctr">
@@ -19591,7 +19875,7 @@
           </a:fontRef>
         </p:style>
         <p:txBody>
-          <a:bodyPr rtlCol="0" anchor="ctr" wrap="square"/>
+          <a:bodyPr wrap="square" rtlCol="0" anchor="ctr"/>
           <a:lstStyle/>
           <a:p>
             <a:pPr algn="l">
@@ -19759,7 +20043,7 @@
 </file>
 
 <file path=ppt/slides/slide18.xml><?xml version="1.0" encoding="utf-8"?>
-<p:sld xmlns:a="http://schemas.openxmlformats.org/drawingml/2006/main" xmlns:p="http://schemas.openxmlformats.org/presentationml/2006/main" xmlns:r="http://schemas.openxmlformats.org/officeDocument/2006/relationships">
+<p:sld xmlns:a="http://schemas.openxmlformats.org/drawingml/2006/main" xmlns:r="http://schemas.openxmlformats.org/officeDocument/2006/relationships" xmlns:p="http://schemas.openxmlformats.org/presentationml/2006/main">
   <p:cSld>
     <p:spTree>
       <p:nvGrpSpPr>
@@ -19767,7 +20051,14 @@
         <p:cNvGrpSpPr/>
         <p:nvPr/>
       </p:nvGrpSpPr>
-      <p:grpSpPr/>
+      <p:grpSpPr>
+        <a:xfrm>
+          <a:off x="0" y="0"/>
+          <a:ext cx="0" cy="0"/>
+          <a:chOff x="0" y="0"/>
+          <a:chExt cx="0" cy="0"/>
+        </a:xfrm>
+      </p:grpSpPr>
       <p:sp>
         <p:nvSpPr>
           <p:cNvPr id="2" name="Rectangle 1"/>
@@ -19808,6 +20099,7 @@
           <a:lstStyle/>
           <a:p>
             <a:pPr algn="ctr"/>
+            <a:endParaRPr/>
           </a:p>
         </p:txBody>
       </p:sp>
@@ -19903,7 +20195,7 @@
         </p:nvSpPr>
         <p:spPr>
           <a:xfrm>
-            <a:off x="5486400" y="3474720"/>
+            <a:off x="4800600" y="3337560"/>
             <a:ext cx="1463040" cy="1463040"/>
           </a:xfrm>
           <a:prstGeom prst="ellipse">
@@ -19931,7 +20223,7 @@
           </a:fontRef>
         </p:style>
         <p:txBody>
-          <a:bodyPr rtlCol="0" anchor="ctr" wrap="square"/>
+          <a:bodyPr wrap="square" rtlCol="0" anchor="ctr"/>
           <a:lstStyle/>
           <a:p>
             <a:pPr algn="ctr">
@@ -19943,11 +20235,23 @@
               </a:defRPr>
             </a:pPr>
             <a:r>
+              <a:rPr dirty="0"/>
               <a:t>LINE</a:t>
             </a:r>
-            <a:br/>
-            <a:r>
-              <a:t>(中心)</a:t>
+            <a:br>
+              <a:rPr dirty="0"/>
+            </a:br>
+            <a:r>
+              <a:rPr dirty="0"/>
+              <a:t>(</a:t>
+            </a:r>
+            <a:r>
+              <a:rPr dirty="0" err="1"/>
+              <a:t>中心</a:t>
+            </a:r>
+            <a:r>
+              <a:rPr dirty="0"/>
+              <a:t>)</a:t>
             </a:r>
           </a:p>
         </p:txBody>
@@ -19990,7 +20294,7 @@
           </a:fontRef>
         </p:style>
         <p:txBody>
-          <a:bodyPr rtlCol="0" anchor="ctr" wrap="square"/>
+          <a:bodyPr wrap="square" rtlCol="0" anchor="ctr"/>
           <a:lstStyle/>
           <a:p>
             <a:pPr algn="ctr">
@@ -20055,7 +20359,7 @@
           </a:fontRef>
         </p:style>
         <p:txBody>
-          <a:bodyPr rtlCol="0" anchor="ctr" wrap="square"/>
+          <a:bodyPr wrap="square" rtlCol="0" anchor="ctr"/>
           <a:lstStyle/>
           <a:p>
             <a:pPr algn="ctr">
@@ -20120,7 +20424,7 @@
           </a:fontRef>
         </p:style>
         <p:txBody>
-          <a:bodyPr rtlCol="0" anchor="ctr" wrap="square"/>
+          <a:bodyPr wrap="square" rtlCol="0" anchor="ctr"/>
           <a:lstStyle/>
           <a:p>
             <a:pPr algn="ctr">
@@ -20181,7 +20485,7 @@
           </a:fontRef>
         </p:style>
         <p:txBody>
-          <a:bodyPr rtlCol="0" anchor="ctr" wrap="square"/>
+          <a:bodyPr wrap="square" rtlCol="0" anchor="ctr"/>
           <a:lstStyle/>
           <a:p>
             <a:pPr algn="ctr">
@@ -20246,7 +20550,7 @@
           </a:fontRef>
         </p:style>
         <p:txBody>
-          <a:bodyPr rtlCol="0" anchor="ctr" wrap="square"/>
+          <a:bodyPr wrap="square" rtlCol="0" anchor="ctr"/>
           <a:lstStyle/>
           <a:p>
             <a:pPr algn="ctr">
@@ -20311,7 +20615,7 @@
           </a:fontRef>
         </p:style>
         <p:txBody>
-          <a:bodyPr rtlCol="0" anchor="ctr" wrap="square"/>
+          <a:bodyPr wrap="square" rtlCol="0" anchor="ctr"/>
           <a:lstStyle/>
           <a:p>
             <a:pPr algn="ctr">
@@ -20376,7 +20680,7 @@
           </a:fontRef>
         </p:style>
         <p:txBody>
-          <a:bodyPr rtlCol="0" anchor="ctr" wrap="square"/>
+          <a:bodyPr wrap="square" rtlCol="0" anchor="ctr"/>
           <a:lstStyle/>
           <a:p>
             <a:pPr algn="ctr">
@@ -20441,7 +20745,7 @@
           </a:fontRef>
         </p:style>
         <p:txBody>
-          <a:bodyPr rtlCol="0" anchor="ctr" wrap="square"/>
+          <a:bodyPr wrap="square" rtlCol="0" anchor="ctr"/>
           <a:lstStyle/>
           <a:p>
             <a:pPr algn="ctr">
@@ -20476,7 +20780,7 @@
         </p:nvSpPr>
         <p:spPr>
           <a:xfrm>
-            <a:off x="6309360" y="1645920"/>
+            <a:off x="6487780" y="1737360"/>
             <a:ext cx="457200" cy="228600"/>
           </a:xfrm>
           <a:prstGeom prst="rightArrow">
@@ -20508,6 +20812,7 @@
           <a:lstStyle/>
           <a:p>
             <a:pPr algn="ctr"/>
+            <a:endParaRPr/>
           </a:p>
         </p:txBody>
       </p:sp>
@@ -20519,7 +20824,7 @@
         </p:nvSpPr>
         <p:spPr>
           <a:xfrm>
-            <a:off x="3383280" y="1645920"/>
+            <a:off x="3979870" y="1757990"/>
             <a:ext cx="457200" cy="228600"/>
           </a:xfrm>
           <a:prstGeom prst="rightArrow">
@@ -20551,6 +20856,7 @@
           <a:lstStyle/>
           <a:p>
             <a:pPr algn="ctr"/>
+            <a:endParaRPr/>
           </a:p>
         </p:txBody>
       </p:sp>
@@ -20562,7 +20868,7 @@
         </p:nvSpPr>
         <p:spPr>
           <a:xfrm>
-            <a:off x="9144000" y="2743200"/>
+            <a:off x="9144000" y="2882033"/>
             <a:ext cx="228600" cy="365760"/>
           </a:xfrm>
           <a:prstGeom prst="downArrow">
@@ -20594,6 +20900,7 @@
           <a:lstStyle/>
           <a:p>
             <a:pPr algn="ctr"/>
+            <a:endParaRPr/>
           </a:p>
         </p:txBody>
       </p:sp>
@@ -20637,6 +20944,7 @@
           <a:lstStyle/>
           <a:p>
             <a:pPr algn="ctr"/>
+            <a:endParaRPr/>
           </a:p>
         </p:txBody>
       </p:sp>
@@ -20678,7 +20986,7 @@
           </a:fontRef>
         </p:style>
         <p:txBody>
-          <a:bodyPr rtlCol="0" anchor="ctr" wrap="square"/>
+          <a:bodyPr wrap="square" rtlCol="0" anchor="ctr"/>
           <a:lstStyle/>
           <a:p>
             <a:pPr algn="ctr">
@@ -20689,6 +20997,7 @@
                 <a:spcPts val="0"/>
               </a:spcAft>
             </a:pPr>
+            <a:endParaRPr/>
           </a:p>
         </p:txBody>
       </p:sp>
@@ -20728,6 +21037,7 @@
                 <a:latin typeface="Meiryo"/>
               </a:defRPr>
             </a:pPr>
+            <a:endParaRPr/>
           </a:p>
         </p:txBody>
       </p:sp>
@@ -20824,7 +21134,7 @@
 </file>
 
 <file path=ppt/slides/slide19.xml><?xml version="1.0" encoding="utf-8"?>
-<p:sld xmlns:a="http://schemas.openxmlformats.org/drawingml/2006/main" xmlns:p="http://schemas.openxmlformats.org/presentationml/2006/main" xmlns:r="http://schemas.openxmlformats.org/officeDocument/2006/relationships">
+<p:sld xmlns:a="http://schemas.openxmlformats.org/drawingml/2006/main" xmlns:r="http://schemas.openxmlformats.org/officeDocument/2006/relationships" xmlns:p="http://schemas.openxmlformats.org/presentationml/2006/main">
   <p:cSld>
     <p:spTree>
       <p:nvGrpSpPr>
@@ -20832,7 +21142,14 @@
         <p:cNvGrpSpPr/>
         <p:nvPr/>
       </p:nvGrpSpPr>
-      <p:grpSpPr/>
+      <p:grpSpPr>
+        <a:xfrm>
+          <a:off x="0" y="0"/>
+          <a:ext cx="0" cy="0"/>
+          <a:chOff x="0" y="0"/>
+          <a:chExt cx="0" cy="0"/>
+        </a:xfrm>
+      </p:grpSpPr>
       <p:sp>
         <p:nvSpPr>
           <p:cNvPr id="2" name="Rectangle 1"/>
@@ -20873,6 +21190,7 @@
           <a:lstStyle/>
           <a:p>
             <a:pPr algn="ctr"/>
+            <a:endParaRPr/>
           </a:p>
         </p:txBody>
       </p:sp>
@@ -21179,7 +21497,7 @@
         <p:spPr>
           <a:xfrm>
             <a:off x="731520" y="2651760"/>
-            <a:ext cx="1828800" cy="274320"/>
+            <a:ext cx="1828800" cy="310341"/>
           </a:xfrm>
           <a:prstGeom prst="rect">
             <a:avLst/>
@@ -21207,8 +21525,14 @@
               </a:defRPr>
             </a:pPr>
             <a:r>
+              <a:rPr lang="ja-JP" altLang="en-US"/>
+              <a:t>専任</a:t>
+            </a:r>
+            <a:r>
+              <a:rPr dirty="0" err="1"/>
               <a:t>人件費</a:t>
             </a:r>
+            <a:endParaRPr dirty="0"/>
           </a:p>
         </p:txBody>
       </p:sp>
@@ -21221,7 +21545,7 @@
         <p:spPr>
           <a:xfrm>
             <a:off x="2743200" y="2651760"/>
-            <a:ext cx="2286000" cy="274320"/>
+            <a:ext cx="2286000" cy="259686"/>
           </a:xfrm>
           <a:prstGeom prst="rect">
             <a:avLst/>
@@ -21249,7 +21573,16 @@
               </a:defRPr>
             </a:pPr>
             <a:r>
-              <a:t>-¥1,600,000</a:t>
+              <a:rPr dirty="0"/>
+              <a:t>¥</a:t>
+            </a:r>
+            <a:r>
+              <a:rPr lang="en-US" dirty="0"/>
+              <a:t>2,0</a:t>
+            </a:r>
+            <a:r>
+              <a:rPr dirty="0"/>
+              <a:t>00,000</a:t>
             </a:r>
           </a:p>
         </p:txBody>
@@ -21290,6 +21623,7 @@
                 <a:latin typeface="Meiryo"/>
               </a:defRPr>
             </a:pPr>
+            <a:endParaRPr/>
           </a:p>
         </p:txBody>
       </p:sp>
@@ -21302,7 +21636,7 @@
         <p:spPr>
           <a:xfrm>
             <a:off x="2743200" y="3108960"/>
-            <a:ext cx="2286000" cy="274320"/>
+            <a:ext cx="2286000" cy="259686"/>
           </a:xfrm>
           <a:prstGeom prst="rect">
             <a:avLst/>
@@ -21330,7 +21664,16 @@
               </a:defRPr>
             </a:pPr>
             <a:r>
-              <a:t>(パート月16万x10ヶ月)</a:t>
+              <a:rPr dirty="0"/>
+              <a:t>(月</a:t>
+            </a:r>
+            <a:r>
+              <a:rPr lang="en-US" dirty="0"/>
+              <a:t>20</a:t>
+            </a:r>
+            <a:r>
+              <a:rPr dirty="0"/>
+              <a:t>万x10ヶ月)</a:t>
             </a:r>
           </a:p>
         </p:txBody>
@@ -21375,6 +21718,7 @@
           <a:lstStyle/>
           <a:p>
             <a:pPr algn="ctr"/>
+            <a:endParaRPr/>
           </a:p>
         </p:txBody>
       </p:sp>
@@ -21429,7 +21773,7 @@
         <p:spPr>
           <a:xfrm>
             <a:off x="2743200" y="3566160"/>
-            <a:ext cx="2286000" cy="274320"/>
+            <a:ext cx="2286000" cy="310341"/>
           </a:xfrm>
           <a:prstGeom prst="rect">
             <a:avLst/>
@@ -21457,7 +21801,16 @@
               </a:defRPr>
             </a:pPr>
             <a:r>
-              <a:t>¥14,623,380</a:t>
+              <a:rPr dirty="0"/>
+              <a:t>¥14,</a:t>
+            </a:r>
+            <a:r>
+              <a:rPr lang="en-US" dirty="0"/>
+              <a:t>2</a:t>
+            </a:r>
+            <a:r>
+              <a:rPr dirty="0"/>
+              <a:t>23,380</a:t>
             </a:r>
           </a:p>
         </p:txBody>
@@ -21584,7 +21937,7 @@
           </a:fontRef>
         </p:style>
         <p:txBody>
-          <a:bodyPr rtlCol="0" anchor="ctr" wrap="square"/>
+          <a:bodyPr wrap="square" rtlCol="0" anchor="ctr"/>
           <a:lstStyle/>
           <a:p>
             <a:pPr algn="ctr">
@@ -21658,7 +22011,7 @@
           </a:fontRef>
         </p:style>
         <p:txBody>
-          <a:bodyPr rtlCol="0" anchor="ctr" wrap="square"/>
+          <a:bodyPr wrap="square" rtlCol="0" anchor="ctr"/>
           <a:lstStyle/>
           <a:p>
             <a:pPr algn="ctr">
@@ -21676,8 +22029,10 @@
               </a:defRPr>
             </a:pPr>
             <a:r>
+              <a:rPr dirty="0" err="1"/>
               <a:t>月平均利益</a:t>
             </a:r>
+            <a:endParaRPr dirty="0"/>
           </a:p>
           <a:p>
             <a:pPr algn="ctr">
@@ -21689,7 +22044,16 @@
               </a:defRPr>
             </a:pPr>
             <a:r>
-              <a:t>¥1,462,338</a:t>
+              <a:rPr dirty="0"/>
+              <a:t>¥1,4</a:t>
+            </a:r>
+            <a:r>
+              <a:rPr lang="en-US" dirty="0"/>
+              <a:t>2</a:t>
+            </a:r>
+            <a:r>
+              <a:rPr dirty="0"/>
+              <a:t>2,338</a:t>
             </a:r>
           </a:p>
         </p:txBody>
@@ -21774,7 +22138,7 @@
           </a:fontRef>
         </p:style>
         <p:txBody>
-          <a:bodyPr rtlCol="0" anchor="ctr" wrap="square"/>
+          <a:bodyPr wrap="square" rtlCol="0" anchor="ctr"/>
           <a:lstStyle/>
           <a:p>
             <a:pPr algn="ctr">
@@ -21785,6 +22149,7 @@
                 <a:spcPts val="0"/>
               </a:spcAft>
             </a:pPr>
+            <a:endParaRPr/>
           </a:p>
         </p:txBody>
       </p:sp>
@@ -21910,7 +22275,7 @@
           </a:fontRef>
         </p:style>
         <p:txBody>
-          <a:bodyPr rtlCol="0" anchor="ctr" wrap="square"/>
+          <a:bodyPr wrap="square" rtlCol="0" anchor="ctr"/>
           <a:lstStyle/>
           <a:p>
             <a:pPr algn="ctr">
@@ -21921,6 +22286,7 @@
                 <a:spcPts val="0"/>
               </a:spcAft>
             </a:pPr>
+            <a:endParaRPr/>
           </a:p>
         </p:txBody>
       </p:sp>
@@ -22046,7 +22412,7 @@
           </a:fontRef>
         </p:style>
         <p:txBody>
-          <a:bodyPr rtlCol="0" anchor="ctr" wrap="square"/>
+          <a:bodyPr wrap="square" rtlCol="0" anchor="ctr"/>
           <a:lstStyle/>
           <a:p>
             <a:pPr algn="ctr">
@@ -22057,6 +22423,7 @@
                 <a:spcPts val="0"/>
               </a:spcAft>
             </a:pPr>
+            <a:endParaRPr/>
           </a:p>
         </p:txBody>
       </p:sp>
@@ -22182,7 +22549,7 @@
           </a:fontRef>
         </p:style>
         <p:txBody>
-          <a:bodyPr rtlCol="0" anchor="ctr" wrap="square"/>
+          <a:bodyPr wrap="square" rtlCol="0" anchor="ctr"/>
           <a:lstStyle/>
           <a:p>
             <a:pPr algn="ctr">
@@ -22193,6 +22560,7 @@
                 <a:spcPts val="0"/>
               </a:spcAft>
             </a:pPr>
+            <a:endParaRPr/>
           </a:p>
         </p:txBody>
       </p:sp>
@@ -22318,7 +22686,7 @@
           </a:fontRef>
         </p:style>
         <p:txBody>
-          <a:bodyPr rtlCol="0" anchor="ctr" wrap="square"/>
+          <a:bodyPr wrap="square" rtlCol="0" anchor="ctr"/>
           <a:lstStyle/>
           <a:p>
             <a:pPr algn="ctr">
@@ -22329,6 +22697,7 @@
                 <a:spcPts val="0"/>
               </a:spcAft>
             </a:pPr>
+            <a:endParaRPr/>
           </a:p>
         </p:txBody>
       </p:sp>
@@ -22424,7 +22793,7 @@
         </p:nvSpPr>
         <p:spPr>
           <a:xfrm>
-            <a:off x="6400800" y="4663440"/>
+            <a:off x="6400800" y="5218325"/>
             <a:ext cx="4572000" cy="274320"/>
           </a:xfrm>
           <a:prstGeom prst="rect">
@@ -22466,7 +22835,7 @@
         </p:nvSpPr>
         <p:spPr>
           <a:xfrm>
-            <a:off x="6400800" y="4983480"/>
+            <a:off x="6400800" y="5538365"/>
             <a:ext cx="3179618" cy="365760"/>
           </a:xfrm>
           <a:prstGeom prst="roundRect">
@@ -22496,7 +22865,7 @@
           </a:fontRef>
         </p:style>
         <p:txBody>
-          <a:bodyPr rtlCol="0" anchor="ctr" wrap="square"/>
+          <a:bodyPr wrap="square" rtlCol="0" anchor="ctr"/>
           <a:lstStyle/>
           <a:p>
             <a:pPr algn="ctr">
@@ -22507,6 +22876,7 @@
                 <a:spcPts val="0"/>
               </a:spcAft>
             </a:pPr>
+            <a:endParaRPr/>
           </a:p>
         </p:txBody>
       </p:sp>
@@ -22518,7 +22888,7 @@
         </p:nvSpPr>
         <p:spPr>
           <a:xfrm>
-            <a:off x="9580418" y="4983480"/>
+            <a:off x="9580418" y="5538365"/>
             <a:ext cx="326018" cy="365760"/>
           </a:xfrm>
           <a:prstGeom prst="roundRect">
@@ -22548,7 +22918,7 @@
           </a:fontRef>
         </p:style>
         <p:txBody>
-          <a:bodyPr rtlCol="0" anchor="ctr" wrap="square"/>
+          <a:bodyPr wrap="square" rtlCol="0" anchor="ctr"/>
           <a:lstStyle/>
           <a:p>
             <a:pPr algn="ctr">
@@ -22559,6 +22929,7 @@
                 <a:spcPts val="0"/>
               </a:spcAft>
             </a:pPr>
+            <a:endParaRPr/>
           </a:p>
         </p:txBody>
       </p:sp>
@@ -22570,7 +22941,7 @@
         </p:nvSpPr>
         <p:spPr>
           <a:xfrm>
-            <a:off x="9906436" y="4983480"/>
+            <a:off x="9906436" y="5538365"/>
             <a:ext cx="222645" cy="365760"/>
           </a:xfrm>
           <a:prstGeom prst="roundRect">
@@ -22600,7 +22971,7 @@
           </a:fontRef>
         </p:style>
         <p:txBody>
-          <a:bodyPr rtlCol="0" anchor="ctr" wrap="square"/>
+          <a:bodyPr wrap="square" rtlCol="0" anchor="ctr"/>
           <a:lstStyle/>
           <a:p>
             <a:pPr algn="ctr">
@@ -22611,6 +22982,7 @@
                 <a:spcPts val="0"/>
               </a:spcAft>
             </a:pPr>
+            <a:endParaRPr/>
           </a:p>
         </p:txBody>
       </p:sp>
@@ -22622,7 +22994,7 @@
         </p:nvSpPr>
         <p:spPr>
           <a:xfrm>
-            <a:off x="10129082" y="4983480"/>
+            <a:off x="10129082" y="5538365"/>
             <a:ext cx="302855" cy="365760"/>
           </a:xfrm>
           <a:prstGeom prst="roundRect">
@@ -22652,7 +23024,7 @@
           </a:fontRef>
         </p:style>
         <p:txBody>
-          <a:bodyPr rtlCol="0" anchor="ctr" wrap="square"/>
+          <a:bodyPr wrap="square" rtlCol="0" anchor="ctr"/>
           <a:lstStyle/>
           <a:p>
             <a:pPr algn="ctr">
@@ -22663,6 +23035,7 @@
                 <a:spcPts val="0"/>
               </a:spcAft>
             </a:pPr>
+            <a:endParaRPr/>
           </a:p>
         </p:txBody>
       </p:sp>
@@ -22674,7 +23047,7 @@
         </p:nvSpPr>
         <p:spPr>
           <a:xfrm>
-            <a:off x="10431937" y="4983480"/>
+            <a:off x="10431937" y="5538365"/>
             <a:ext cx="91440" cy="365760"/>
           </a:xfrm>
           <a:prstGeom prst="roundRect">
@@ -22704,7 +23077,7 @@
           </a:fontRef>
         </p:style>
         <p:txBody>
-          <a:bodyPr rtlCol="0" anchor="ctr" wrap="square"/>
+          <a:bodyPr wrap="square" rtlCol="0" anchor="ctr"/>
           <a:lstStyle/>
           <a:p>
             <a:pPr algn="ctr">
@@ -22715,6 +23088,7 @@
                 <a:spcPts val="0"/>
               </a:spcAft>
             </a:pPr>
+            <a:endParaRPr/>
           </a:p>
         </p:txBody>
       </p:sp>
@@ -22726,7 +23100,7 @@
         </p:nvSpPr>
         <p:spPr>
           <a:xfrm>
-            <a:off x="6400800" y="5440680"/>
+            <a:off x="6400800" y="5995565"/>
             <a:ext cx="182880" cy="137160"/>
           </a:xfrm>
           <a:prstGeom prst="roundRect">
@@ -22756,7 +23130,7 @@
           </a:fontRef>
         </p:style>
         <p:txBody>
-          <a:bodyPr rtlCol="0" anchor="ctr" wrap="square"/>
+          <a:bodyPr wrap="square" rtlCol="0" anchor="ctr"/>
           <a:lstStyle/>
           <a:p>
             <a:pPr algn="ctr">
@@ -22767,6 +23141,7 @@
                 <a:spcPts val="0"/>
               </a:spcAft>
             </a:pPr>
+            <a:endParaRPr/>
           </a:p>
         </p:txBody>
       </p:sp>
@@ -22778,7 +23153,7 @@
         </p:nvSpPr>
         <p:spPr>
           <a:xfrm>
-            <a:off x="6629400" y="5413248"/>
+            <a:off x="6629400" y="5968133"/>
             <a:ext cx="1371600" cy="182880"/>
           </a:xfrm>
           <a:prstGeom prst="rect">
@@ -22820,7 +23195,7 @@
         </p:nvSpPr>
         <p:spPr>
           <a:xfrm>
-            <a:off x="8046720" y="5440680"/>
+            <a:off x="8046720" y="5995565"/>
             <a:ext cx="182880" cy="137160"/>
           </a:xfrm>
           <a:prstGeom prst="roundRect">
@@ -22850,7 +23225,7 @@
           </a:fontRef>
         </p:style>
         <p:txBody>
-          <a:bodyPr rtlCol="0" anchor="ctr" wrap="square"/>
+          <a:bodyPr wrap="square" rtlCol="0" anchor="ctr"/>
           <a:lstStyle/>
           <a:p>
             <a:pPr algn="ctr">
@@ -22861,6 +23236,7 @@
                 <a:spcPts val="0"/>
               </a:spcAft>
             </a:pPr>
+            <a:endParaRPr/>
           </a:p>
         </p:txBody>
       </p:sp>
@@ -22872,7 +23248,7 @@
         </p:nvSpPr>
         <p:spPr>
           <a:xfrm>
-            <a:off x="8275320" y="5413248"/>
+            <a:off x="8275320" y="5968133"/>
             <a:ext cx="1371600" cy="182880"/>
           </a:xfrm>
           <a:prstGeom prst="rect">
@@ -22914,7 +23290,7 @@
         </p:nvSpPr>
         <p:spPr>
           <a:xfrm>
-            <a:off x="9692640" y="5440680"/>
+            <a:off x="9692640" y="5995565"/>
             <a:ext cx="182880" cy="137160"/>
           </a:xfrm>
           <a:prstGeom prst="roundRect">
@@ -22944,7 +23320,7 @@
           </a:fontRef>
         </p:style>
         <p:txBody>
-          <a:bodyPr rtlCol="0" anchor="ctr" wrap="square"/>
+          <a:bodyPr wrap="square" rtlCol="0" anchor="ctr"/>
           <a:lstStyle/>
           <a:p>
             <a:pPr algn="ctr">
@@ -22955,6 +23331,7 @@
                 <a:spcPts val="0"/>
               </a:spcAft>
             </a:pPr>
+            <a:endParaRPr/>
           </a:p>
         </p:txBody>
       </p:sp>
@@ -22966,7 +23343,7 @@
         </p:nvSpPr>
         <p:spPr>
           <a:xfrm>
-            <a:off x="9921240" y="5413248"/>
+            <a:off x="9875520" y="5970141"/>
             <a:ext cx="1371600" cy="182880"/>
           </a:xfrm>
           <a:prstGeom prst="rect">
@@ -22995,7 +23372,12 @@
               </a:defRPr>
             </a:pPr>
             <a:r>
-              <a:t>メルカリ 5%</a:t>
+              <a:rPr dirty="0" err="1"/>
+              <a:t>メルカリ</a:t>
+            </a:r>
+            <a:r>
+              <a:rPr dirty="0"/>
+              <a:t> 5%</a:t>
             </a:r>
           </a:p>
         </p:txBody>
@@ -23008,7 +23390,7 @@
         </p:nvSpPr>
         <p:spPr>
           <a:xfrm>
-            <a:off x="6400800" y="5669280"/>
+            <a:off x="6400800" y="6224165"/>
             <a:ext cx="182880" cy="137160"/>
           </a:xfrm>
           <a:prstGeom prst="roundRect">
@@ -23038,7 +23420,7 @@
           </a:fontRef>
         </p:style>
         <p:txBody>
-          <a:bodyPr rtlCol="0" anchor="ctr" wrap="square"/>
+          <a:bodyPr wrap="square" rtlCol="0" anchor="ctr"/>
           <a:lstStyle/>
           <a:p>
             <a:pPr algn="ctr">
@@ -23049,6 +23431,7 @@
                 <a:spcPts val="0"/>
               </a:spcAft>
             </a:pPr>
+            <a:endParaRPr/>
           </a:p>
         </p:txBody>
       </p:sp>
@@ -23060,7 +23443,7 @@
         </p:nvSpPr>
         <p:spPr>
           <a:xfrm>
-            <a:off x="6629400" y="5641848"/>
+            <a:off x="6629400" y="6196733"/>
             <a:ext cx="1371600" cy="182880"/>
           </a:xfrm>
           <a:prstGeom prst="rect">
@@ -23102,7 +23485,7 @@
         </p:nvSpPr>
         <p:spPr>
           <a:xfrm>
-            <a:off x="8046720" y="5669280"/>
+            <a:off x="8046720" y="6224165"/>
             <a:ext cx="182880" cy="137160"/>
           </a:xfrm>
           <a:prstGeom prst="roundRect">
@@ -23132,7 +23515,7 @@
           </a:fontRef>
         </p:style>
         <p:txBody>
-          <a:bodyPr rtlCol="0" anchor="ctr" wrap="square"/>
+          <a:bodyPr wrap="square" rtlCol="0" anchor="ctr"/>
           <a:lstStyle/>
           <a:p>
             <a:pPr algn="ctr">
@@ -23143,6 +23526,7 @@
                 <a:spcPts val="0"/>
               </a:spcAft>
             </a:pPr>
+            <a:endParaRPr/>
           </a:p>
         </p:txBody>
       </p:sp>
@@ -23154,7 +23538,7 @@
         </p:nvSpPr>
         <p:spPr>
           <a:xfrm>
-            <a:off x="8275320" y="5641848"/>
+            <a:off x="8275320" y="6196733"/>
             <a:ext cx="1371600" cy="182880"/>
           </a:xfrm>
           <a:prstGeom prst="rect">
@@ -23281,7 +23665,7 @@
 </file>
 
 <file path=ppt/slides/slide2.xml><?xml version="1.0" encoding="utf-8"?>
-<p:sld xmlns:a="http://schemas.openxmlformats.org/drawingml/2006/main" xmlns:p="http://schemas.openxmlformats.org/presentationml/2006/main" xmlns:r="http://schemas.openxmlformats.org/officeDocument/2006/relationships">
+<p:sld xmlns:a="http://schemas.openxmlformats.org/drawingml/2006/main" xmlns:r="http://schemas.openxmlformats.org/officeDocument/2006/relationships" xmlns:p="http://schemas.openxmlformats.org/presentationml/2006/main">
   <p:cSld>
     <p:spTree>
       <p:nvGrpSpPr>
@@ -23289,7 +23673,14 @@
         <p:cNvGrpSpPr/>
         <p:nvPr/>
       </p:nvGrpSpPr>
-      <p:grpSpPr/>
+      <p:grpSpPr>
+        <a:xfrm>
+          <a:off x="0" y="0"/>
+          <a:ext cx="0" cy="0"/>
+          <a:chOff x="0" y="0"/>
+          <a:chExt cx="0" cy="0"/>
+        </a:xfrm>
+      </p:grpSpPr>
       <p:sp>
         <p:nvSpPr>
           <p:cNvPr id="2" name="Rectangle 1"/>
@@ -23330,6 +23721,7 @@
           <a:lstStyle/>
           <a:p>
             <a:pPr algn="ctr"/>
+            <a:endParaRPr/>
           </a:p>
         </p:txBody>
       </p:sp>
@@ -23472,6 +23864,7 @@
                 <a:latin typeface="Meiryo"/>
               </a:defRPr>
             </a:pPr>
+            <a:endParaRPr/>
           </a:p>
           <a:p>
             <a:pPr algn="ctr">
@@ -23551,7 +23944,7 @@
           </a:fontRef>
         </p:style>
         <p:txBody>
-          <a:bodyPr rtlCol="0" anchor="ctr" wrap="square"/>
+          <a:bodyPr wrap="square" rtlCol="0" anchor="ctr"/>
           <a:lstStyle/>
           <a:p>
             <a:pPr algn="ctr">
@@ -23576,6 +23969,7 @@
             <a:pPr>
               <a:defRPr sz="600"/>
             </a:pPr>
+            <a:endParaRPr/>
           </a:p>
           <a:p>
             <a:pPr algn="ctr">
@@ -23637,7 +24031,7 @@
           </a:fontRef>
         </p:style>
         <p:txBody>
-          <a:bodyPr rtlCol="0" anchor="ctr" wrap="square"/>
+          <a:bodyPr wrap="square" rtlCol="0" anchor="ctr"/>
           <a:lstStyle/>
           <a:p>
             <a:pPr algn="ctr">
@@ -23662,6 +24056,7 @@
             <a:pPr>
               <a:defRPr sz="600"/>
             </a:pPr>
+            <a:endParaRPr/>
           </a:p>
           <a:p>
             <a:pPr algn="ctr">
@@ -23723,7 +24118,7 @@
           </a:fontRef>
         </p:style>
         <p:txBody>
-          <a:bodyPr rtlCol="0" anchor="ctr" wrap="square"/>
+          <a:bodyPr wrap="square" rtlCol="0" anchor="ctr"/>
           <a:lstStyle/>
           <a:p>
             <a:pPr algn="ctr">
@@ -23748,6 +24143,7 @@
             <a:pPr>
               <a:defRPr sz="600"/>
             </a:pPr>
+            <a:endParaRPr/>
           </a:p>
           <a:p>
             <a:pPr algn="ctr">
@@ -23809,7 +24205,7 @@
           </a:fontRef>
         </p:style>
         <p:txBody>
-          <a:bodyPr rtlCol="0" anchor="ctr" wrap="square"/>
+          <a:bodyPr wrap="square" rtlCol="0" anchor="ctr"/>
           <a:lstStyle/>
           <a:p>
             <a:pPr algn="ctr">
@@ -23834,6 +24230,7 @@
             <a:pPr>
               <a:defRPr sz="600"/>
             </a:pPr>
+            <a:endParaRPr/>
           </a:p>
           <a:p>
             <a:pPr algn="ctr">
@@ -23992,7 +24389,7 @@
 </file>
 
 <file path=ppt/slides/slide20.xml><?xml version="1.0" encoding="utf-8"?>
-<p:sld xmlns:a="http://schemas.openxmlformats.org/drawingml/2006/main" xmlns:p="http://schemas.openxmlformats.org/presentationml/2006/main" xmlns:r="http://schemas.openxmlformats.org/officeDocument/2006/relationships">
+<p:sld xmlns:a="http://schemas.openxmlformats.org/drawingml/2006/main" xmlns:r="http://schemas.openxmlformats.org/officeDocument/2006/relationships" xmlns:p="http://schemas.openxmlformats.org/presentationml/2006/main">
   <p:cSld>
     <p:spTree>
       <p:nvGrpSpPr>
@@ -24000,7 +24397,14 @@
         <p:cNvGrpSpPr/>
         <p:nvPr/>
       </p:nvGrpSpPr>
-      <p:grpSpPr/>
+      <p:grpSpPr>
+        <a:xfrm>
+          <a:off x="0" y="0"/>
+          <a:ext cx="0" cy="0"/>
+          <a:chOff x="0" y="0"/>
+          <a:chExt cx="0" cy="0"/>
+        </a:xfrm>
+      </p:grpSpPr>
       <p:sp>
         <p:nvSpPr>
           <p:cNvPr id="2" name="Rectangle 1"/>
@@ -24041,6 +24445,7 @@
           <a:lstStyle/>
           <a:p>
             <a:pPr algn="ctr"/>
+            <a:endParaRPr/>
           </a:p>
         </p:txBody>
       </p:sp>
@@ -24166,7 +24571,7 @@
           </a:fontRef>
         </p:style>
         <p:txBody>
-          <a:bodyPr rtlCol="0" anchor="ctr" wrap="square"/>
+          <a:bodyPr wrap="square" rtlCol="0" anchor="ctr"/>
           <a:lstStyle/>
           <a:p>
             <a:pPr algn="ctr">
@@ -24231,7 +24636,7 @@
           </a:fontRef>
         </p:style>
         <p:txBody>
-          <a:bodyPr rtlCol="0" anchor="ctr" wrap="square"/>
+          <a:bodyPr wrap="square" rtlCol="0" anchor="ctr"/>
           <a:lstStyle/>
           <a:p>
             <a:pPr algn="l">
@@ -24292,7 +24697,7 @@
           </a:fontRef>
         </p:style>
         <p:txBody>
-          <a:bodyPr rtlCol="0" anchor="ctr" wrap="square"/>
+          <a:bodyPr wrap="square" rtlCol="0" anchor="ctr"/>
           <a:lstStyle/>
           <a:p>
             <a:pPr algn="l">
@@ -24353,7 +24758,7 @@
           </a:fontRef>
         </p:style>
         <p:txBody>
-          <a:bodyPr rtlCol="0" anchor="ctr" wrap="square"/>
+          <a:bodyPr wrap="square" rtlCol="0" anchor="ctr"/>
           <a:lstStyle/>
           <a:p>
             <a:pPr algn="l">
@@ -24414,7 +24819,7 @@
           </a:fontRef>
         </p:style>
         <p:txBody>
-          <a:bodyPr rtlCol="0" anchor="ctr" wrap="square"/>
+          <a:bodyPr wrap="square" rtlCol="0" anchor="ctr"/>
           <a:lstStyle/>
           <a:p>
             <a:pPr algn="l">
@@ -24475,7 +24880,7 @@
           </a:fontRef>
         </p:style>
         <p:txBody>
-          <a:bodyPr rtlCol="0" anchor="ctr" wrap="square"/>
+          <a:bodyPr wrap="square" rtlCol="0" anchor="ctr"/>
           <a:lstStyle/>
           <a:p>
             <a:pPr algn="l">
@@ -24536,7 +24941,7 @@
           </a:fontRef>
         </p:style>
         <p:txBody>
-          <a:bodyPr rtlCol="0" anchor="ctr" wrap="square"/>
+          <a:bodyPr wrap="square" rtlCol="0" anchor="ctr"/>
           <a:lstStyle/>
           <a:p>
             <a:pPr algn="l">
@@ -24599,6 +25004,7 @@
           <a:lstStyle/>
           <a:p>
             <a:pPr algn="ctr"/>
+            <a:endParaRPr/>
           </a:p>
         </p:txBody>
       </p:sp>
@@ -24640,7 +25046,7 @@
           </a:fontRef>
         </p:style>
         <p:txBody>
-          <a:bodyPr rtlCol="0" anchor="ctr" wrap="square"/>
+          <a:bodyPr wrap="square" rtlCol="0" anchor="ctr"/>
           <a:lstStyle/>
           <a:p>
             <a:pPr algn="ctr">
@@ -24705,7 +25111,7 @@
           </a:fontRef>
         </p:style>
         <p:txBody>
-          <a:bodyPr rtlCol="0" anchor="ctr" wrap="square"/>
+          <a:bodyPr wrap="square" rtlCol="0" anchor="ctr"/>
           <a:lstStyle/>
           <a:p>
             <a:pPr algn="l">
@@ -24766,7 +25172,7 @@
           </a:fontRef>
         </p:style>
         <p:txBody>
-          <a:bodyPr rtlCol="0" anchor="ctr" wrap="square"/>
+          <a:bodyPr wrap="square" rtlCol="0" anchor="ctr"/>
           <a:lstStyle/>
           <a:p>
             <a:pPr algn="l">
@@ -24827,7 +25233,7 @@
           </a:fontRef>
         </p:style>
         <p:txBody>
-          <a:bodyPr rtlCol="0" anchor="ctr" wrap="square"/>
+          <a:bodyPr wrap="square" rtlCol="0" anchor="ctr"/>
           <a:lstStyle/>
           <a:p>
             <a:pPr algn="l">
@@ -24888,7 +25294,7 @@
           </a:fontRef>
         </p:style>
         <p:txBody>
-          <a:bodyPr rtlCol="0" anchor="ctr" wrap="square"/>
+          <a:bodyPr wrap="square" rtlCol="0" anchor="ctr"/>
           <a:lstStyle/>
           <a:p>
             <a:pPr algn="l">
@@ -24949,7 +25355,7 @@
           </a:fontRef>
         </p:style>
         <p:txBody>
-          <a:bodyPr rtlCol="0" anchor="ctr" wrap="square"/>
+          <a:bodyPr wrap="square" rtlCol="0" anchor="ctr"/>
           <a:lstStyle/>
           <a:p>
             <a:pPr algn="l">
@@ -25012,6 +25418,7 @@
           <a:lstStyle/>
           <a:p>
             <a:pPr algn="ctr"/>
+            <a:endParaRPr/>
           </a:p>
         </p:txBody>
       </p:sp>
@@ -25053,7 +25460,7 @@
           </a:fontRef>
         </p:style>
         <p:txBody>
-          <a:bodyPr rtlCol="0" anchor="ctr" wrap="square"/>
+          <a:bodyPr wrap="square" rtlCol="0" anchor="ctr"/>
           <a:lstStyle/>
           <a:p>
             <a:pPr algn="ctr">
@@ -25118,7 +25525,7 @@
           </a:fontRef>
         </p:style>
         <p:txBody>
-          <a:bodyPr rtlCol="0" anchor="ctr" wrap="square"/>
+          <a:bodyPr wrap="square" rtlCol="0" anchor="ctr"/>
           <a:lstStyle/>
           <a:p>
             <a:pPr algn="l">
@@ -25179,7 +25586,7 @@
           </a:fontRef>
         </p:style>
         <p:txBody>
-          <a:bodyPr rtlCol="0" anchor="ctr" wrap="square"/>
+          <a:bodyPr wrap="square" rtlCol="0" anchor="ctr"/>
           <a:lstStyle/>
           <a:p>
             <a:pPr algn="l">
@@ -25240,7 +25647,7 @@
           </a:fontRef>
         </p:style>
         <p:txBody>
-          <a:bodyPr rtlCol="0" anchor="ctr" wrap="square"/>
+          <a:bodyPr wrap="square" rtlCol="0" anchor="ctr"/>
           <a:lstStyle/>
           <a:p>
             <a:pPr algn="l">
@@ -25301,7 +25708,7 @@
           </a:fontRef>
         </p:style>
         <p:txBody>
-          <a:bodyPr rtlCol="0" anchor="ctr" wrap="square"/>
+          <a:bodyPr wrap="square" rtlCol="0" anchor="ctr"/>
           <a:lstStyle/>
           <a:p>
             <a:pPr algn="l">
@@ -25364,6 +25771,7 @@
           <a:lstStyle/>
           <a:p>
             <a:pPr algn="ctr"/>
+            <a:endParaRPr/>
           </a:p>
         </p:txBody>
       </p:sp>
@@ -25405,7 +25813,7 @@
           </a:fontRef>
         </p:style>
         <p:txBody>
-          <a:bodyPr rtlCol="0" anchor="ctr" wrap="square"/>
+          <a:bodyPr wrap="square" rtlCol="0" anchor="ctr"/>
           <a:lstStyle/>
           <a:p>
             <a:pPr algn="ctr">
@@ -25470,7 +25878,7 @@
           </a:fontRef>
         </p:style>
         <p:txBody>
-          <a:bodyPr rtlCol="0" anchor="ctr" wrap="square"/>
+          <a:bodyPr wrap="square" rtlCol="0" anchor="ctr"/>
           <a:lstStyle/>
           <a:p>
             <a:pPr algn="l">
@@ -25531,7 +25939,7 @@
           </a:fontRef>
         </p:style>
         <p:txBody>
-          <a:bodyPr rtlCol="0" anchor="ctr" wrap="square"/>
+          <a:bodyPr wrap="square" rtlCol="0" anchor="ctr"/>
           <a:lstStyle/>
           <a:p>
             <a:pPr algn="l">
@@ -25592,7 +26000,7 @@
           </a:fontRef>
         </p:style>
         <p:txBody>
-          <a:bodyPr rtlCol="0" anchor="ctr" wrap="square"/>
+          <a:bodyPr wrap="square" rtlCol="0" anchor="ctr"/>
           <a:lstStyle/>
           <a:p>
             <a:pPr algn="l">
@@ -25653,7 +26061,7 @@
           </a:fontRef>
         </p:style>
         <p:txBody>
-          <a:bodyPr rtlCol="0" anchor="ctr" wrap="square"/>
+          <a:bodyPr wrap="square" rtlCol="0" anchor="ctr"/>
           <a:lstStyle/>
           <a:p>
             <a:pPr algn="l">
@@ -25714,7 +26122,7 @@
           </a:fontRef>
         </p:style>
         <p:txBody>
-          <a:bodyPr rtlCol="0" anchor="ctr" wrap="square"/>
+          <a:bodyPr wrap="square" rtlCol="0" anchor="ctr"/>
           <a:lstStyle/>
           <a:p>
             <a:pPr algn="l">
@@ -25777,6 +26185,7 @@
           <a:lstStyle/>
           <a:p>
             <a:pPr algn="ctr"/>
+            <a:endParaRPr/>
           </a:p>
         </p:txBody>
       </p:sp>
@@ -25818,7 +26227,7 @@
           </a:fontRef>
         </p:style>
         <p:txBody>
-          <a:bodyPr rtlCol="0" anchor="ctr" wrap="square"/>
+          <a:bodyPr wrap="square" rtlCol="0" anchor="ctr"/>
           <a:lstStyle/>
           <a:p>
             <a:pPr algn="ctr">
@@ -25883,7 +26292,7 @@
           </a:fontRef>
         </p:style>
         <p:txBody>
-          <a:bodyPr rtlCol="0" anchor="ctr" wrap="square"/>
+          <a:bodyPr wrap="square" rtlCol="0" anchor="ctr"/>
           <a:lstStyle/>
           <a:p>
             <a:pPr algn="l">
@@ -25944,7 +26353,7 @@
           </a:fontRef>
         </p:style>
         <p:txBody>
-          <a:bodyPr rtlCol="0" anchor="ctr" wrap="square"/>
+          <a:bodyPr wrap="square" rtlCol="0" anchor="ctr"/>
           <a:lstStyle/>
           <a:p>
             <a:pPr algn="l">
@@ -26005,7 +26414,7 @@
           </a:fontRef>
         </p:style>
         <p:txBody>
-          <a:bodyPr rtlCol="0" anchor="ctr" wrap="square"/>
+          <a:bodyPr wrap="square" rtlCol="0" anchor="ctr"/>
           <a:lstStyle/>
           <a:p>
             <a:pPr algn="ctr">
@@ -26134,7 +26543,7 @@
 </file>
 
 <file path=ppt/slides/slide3.xml><?xml version="1.0" encoding="utf-8"?>
-<p:sld xmlns:a="http://schemas.openxmlformats.org/drawingml/2006/main" xmlns:p="http://schemas.openxmlformats.org/presentationml/2006/main" xmlns:r="http://schemas.openxmlformats.org/officeDocument/2006/relationships">
+<p:sld xmlns:a="http://schemas.openxmlformats.org/drawingml/2006/main" xmlns:r="http://schemas.openxmlformats.org/officeDocument/2006/relationships" xmlns:p="http://schemas.openxmlformats.org/presentationml/2006/main">
   <p:cSld>
     <p:spTree>
       <p:nvGrpSpPr>
@@ -26142,7 +26551,14 @@
         <p:cNvGrpSpPr/>
         <p:nvPr/>
       </p:nvGrpSpPr>
-      <p:grpSpPr/>
+      <p:grpSpPr>
+        <a:xfrm>
+          <a:off x="0" y="0"/>
+          <a:ext cx="0" cy="0"/>
+          <a:chOff x="0" y="0"/>
+          <a:chExt cx="0" cy="0"/>
+        </a:xfrm>
+      </p:grpSpPr>
       <p:sp>
         <p:nvSpPr>
           <p:cNvPr id="2" name="Rectangle 1"/>
@@ -26183,6 +26599,7 @@
           <a:lstStyle/>
           <a:p>
             <a:pPr algn="ctr"/>
+            <a:endParaRPr/>
           </a:p>
         </p:txBody>
       </p:sp>
@@ -26308,7 +26725,7 @@
           </a:fontRef>
         </p:style>
         <p:txBody>
-          <a:bodyPr rtlCol="0" anchor="ctr" wrap="square"/>
+          <a:bodyPr wrap="square" rtlCol="0" anchor="ctr"/>
           <a:lstStyle/>
           <a:p>
             <a:pPr algn="ctr">
@@ -26394,7 +26811,7 @@
           </a:fontRef>
         </p:style>
         <p:txBody>
-          <a:bodyPr rtlCol="0" anchor="ctr" wrap="square"/>
+          <a:bodyPr wrap="square" rtlCol="0" anchor="ctr"/>
           <a:lstStyle/>
           <a:p>
             <a:pPr algn="ctr">
@@ -26461,7 +26878,7 @@
           </a:fontRef>
         </p:style>
         <p:txBody>
-          <a:bodyPr rtlCol="0" anchor="ctr" wrap="square"/>
+          <a:bodyPr wrap="square" rtlCol="0" anchor="ctr"/>
           <a:lstStyle/>
           <a:p>
             <a:pPr algn="ctr">
@@ -26573,6 +26990,7 @@
           <a:lstStyle/>
           <a:p>
             <a:pPr algn="ctr"/>
+            <a:endParaRPr/>
           </a:p>
         </p:txBody>
       </p:sp>
@@ -26614,7 +27032,7 @@
           </a:fontRef>
         </p:style>
         <p:txBody>
-          <a:bodyPr rtlCol="0" anchor="ctr" wrap="square"/>
+          <a:bodyPr wrap="square" rtlCol="0" anchor="ctr"/>
           <a:lstStyle/>
           <a:p>
             <a:pPr algn="ctr">
@@ -26703,6 +27121,7 @@
           <a:lstStyle/>
           <a:p>
             <a:pPr algn="ctr"/>
+            <a:endParaRPr/>
           </a:p>
         </p:txBody>
       </p:sp>
@@ -26744,7 +27163,7 @@
           </a:fontRef>
         </p:style>
         <p:txBody>
-          <a:bodyPr rtlCol="0" anchor="ctr" wrap="square"/>
+          <a:bodyPr wrap="square" rtlCol="0" anchor="ctr"/>
           <a:lstStyle/>
           <a:p>
             <a:pPr algn="ctr">
@@ -26833,6 +27252,7 @@
           <a:lstStyle/>
           <a:p>
             <a:pPr algn="ctr"/>
+            <a:endParaRPr/>
           </a:p>
         </p:txBody>
       </p:sp>
@@ -26874,7 +27294,7 @@
           </a:fontRef>
         </p:style>
         <p:txBody>
-          <a:bodyPr rtlCol="0" anchor="ctr" wrap="square"/>
+          <a:bodyPr wrap="square" rtlCol="0" anchor="ctr"/>
           <a:lstStyle/>
           <a:p>
             <a:pPr algn="ctr">
@@ -26963,6 +27383,7 @@
           <a:lstStyle/>
           <a:p>
             <a:pPr algn="ctr"/>
+            <a:endParaRPr/>
           </a:p>
         </p:txBody>
       </p:sp>
@@ -27006,6 +27427,7 @@
           <a:lstStyle/>
           <a:p>
             <a:pPr algn="ctr"/>
+            <a:endParaRPr/>
           </a:p>
         </p:txBody>
       </p:sp>
@@ -27047,7 +27469,7 @@
           </a:fontRef>
         </p:style>
         <p:txBody>
-          <a:bodyPr rtlCol="0" anchor="ctr" wrap="square"/>
+          <a:bodyPr wrap="square" rtlCol="0" anchor="ctr"/>
           <a:lstStyle/>
           <a:p>
             <a:pPr algn="ctr">
@@ -27121,7 +27543,7 @@
           </a:fontRef>
         </p:style>
         <p:txBody>
-          <a:bodyPr rtlCol="0" anchor="ctr" wrap="square"/>
+          <a:bodyPr wrap="square" rtlCol="0" anchor="ctr"/>
           <a:lstStyle/>
           <a:p>
             <a:pPr algn="ctr">
@@ -27237,7 +27659,7 @@
           </a:fontRef>
         </p:style>
         <p:txBody>
-          <a:bodyPr rtlCol="0" anchor="ctr" wrap="square"/>
+          <a:bodyPr wrap="square" rtlCol="0" anchor="ctr"/>
           <a:lstStyle/>
           <a:p>
             <a:pPr algn="ctr">
@@ -27302,7 +27724,7 @@
           </a:fontRef>
         </p:style>
         <p:txBody>
-          <a:bodyPr rtlCol="0" anchor="ctr" wrap="square"/>
+          <a:bodyPr wrap="square" rtlCol="0" anchor="ctr"/>
           <a:lstStyle/>
           <a:p>
             <a:pPr algn="ctr">
@@ -27369,6 +27791,7 @@
           <a:lstStyle/>
           <a:p>
             <a:pPr algn="ctr"/>
+            <a:endParaRPr/>
           </a:p>
         </p:txBody>
       </p:sp>
@@ -27410,7 +27833,7 @@
           </a:fontRef>
         </p:style>
         <p:txBody>
-          <a:bodyPr rtlCol="0" anchor="ctr" wrap="square"/>
+          <a:bodyPr wrap="square" rtlCol="0" anchor="ctr"/>
           <a:lstStyle/>
           <a:p>
             <a:pPr algn="ctr">
@@ -27477,6 +27900,7 @@
           <a:lstStyle/>
           <a:p>
             <a:pPr algn="ctr"/>
+            <a:endParaRPr/>
           </a:p>
         </p:txBody>
       </p:sp>
@@ -27518,7 +27942,7 @@
           </a:fontRef>
         </p:style>
         <p:txBody>
-          <a:bodyPr rtlCol="0" anchor="ctr" wrap="square"/>
+          <a:bodyPr wrap="square" rtlCol="0" anchor="ctr"/>
           <a:lstStyle/>
           <a:p>
             <a:pPr algn="ctr">
@@ -27583,7 +28007,7 @@
           </a:fontRef>
         </p:style>
         <p:txBody>
-          <a:bodyPr rtlCol="0" anchor="ctr" wrap="square"/>
+          <a:bodyPr wrap="square" rtlCol="0" anchor="ctr"/>
           <a:lstStyle/>
           <a:p>
             <a:pPr algn="ctr">
@@ -27650,6 +28074,7 @@
           <a:lstStyle/>
           <a:p>
             <a:pPr algn="ctr"/>
+            <a:endParaRPr/>
           </a:p>
         </p:txBody>
       </p:sp>
@@ -27691,7 +28116,7 @@
           </a:fontRef>
         </p:style>
         <p:txBody>
-          <a:bodyPr rtlCol="0" anchor="ctr" wrap="square"/>
+          <a:bodyPr wrap="square" rtlCol="0" anchor="ctr"/>
           <a:lstStyle/>
           <a:p>
             <a:pPr algn="ctr">
@@ -27752,7 +28177,7 @@
           </a:fontRef>
         </p:style>
         <p:txBody>
-          <a:bodyPr rtlCol="0" anchor="ctr" wrap="square"/>
+          <a:bodyPr wrap="square" rtlCol="0" anchor="ctr"/>
           <a:lstStyle/>
           <a:p>
             <a:pPr algn="ctr">
@@ -27819,6 +28244,7 @@
           <a:lstStyle/>
           <a:p>
             <a:pPr algn="ctr"/>
+            <a:endParaRPr/>
           </a:p>
         </p:txBody>
       </p:sp>
@@ -27915,7 +28341,7 @@
 </file>
 
 <file path=ppt/slides/slide4.xml><?xml version="1.0" encoding="utf-8"?>
-<p:sld xmlns:a="http://schemas.openxmlformats.org/drawingml/2006/main" xmlns:p="http://schemas.openxmlformats.org/presentationml/2006/main" xmlns:r="http://schemas.openxmlformats.org/officeDocument/2006/relationships">
+<p:sld xmlns:a="http://schemas.openxmlformats.org/drawingml/2006/main" xmlns:r="http://schemas.openxmlformats.org/officeDocument/2006/relationships" xmlns:p="http://schemas.openxmlformats.org/presentationml/2006/main">
   <p:cSld>
     <p:spTree>
       <p:nvGrpSpPr>
@@ -27923,7 +28349,14 @@
         <p:cNvGrpSpPr/>
         <p:nvPr/>
       </p:nvGrpSpPr>
-      <p:grpSpPr/>
+      <p:grpSpPr>
+        <a:xfrm>
+          <a:off x="0" y="0"/>
+          <a:ext cx="0" cy="0"/>
+          <a:chOff x="0" y="0"/>
+          <a:chExt cx="0" cy="0"/>
+        </a:xfrm>
+      </p:grpSpPr>
       <p:sp>
         <p:nvSpPr>
           <p:cNvPr id="2" name="Rectangle 1"/>
@@ -27964,6 +28397,7 @@
           <a:lstStyle/>
           <a:p>
             <a:pPr algn="ctr"/>
+            <a:endParaRPr/>
           </a:p>
         </p:txBody>
       </p:sp>
@@ -28131,7 +28565,7 @@
           </a:fontRef>
         </p:style>
         <p:txBody>
-          <a:bodyPr rtlCol="0" anchor="ctr" wrap="square"/>
+          <a:bodyPr wrap="square" rtlCol="0" anchor="ctr"/>
           <a:lstStyle/>
           <a:p>
             <a:pPr algn="ctr">
@@ -28192,7 +28626,7 @@
           </a:fontRef>
         </p:style>
         <p:txBody>
-          <a:bodyPr rtlCol="0" anchor="ctr" wrap="square"/>
+          <a:bodyPr wrap="square" rtlCol="0" anchor="ctr"/>
           <a:lstStyle/>
           <a:p>
             <a:pPr algn="ctr">
@@ -28253,7 +28687,7 @@
           </a:fontRef>
         </p:style>
         <p:txBody>
-          <a:bodyPr rtlCol="0" anchor="ctr" wrap="square"/>
+          <a:bodyPr wrap="square" rtlCol="0" anchor="ctr"/>
           <a:lstStyle/>
           <a:p>
             <a:pPr algn="ctr">
@@ -28314,7 +28748,7 @@
           </a:fontRef>
         </p:style>
         <p:txBody>
-          <a:bodyPr rtlCol="0" anchor="ctr" wrap="square"/>
+          <a:bodyPr wrap="square" rtlCol="0" anchor="ctr"/>
           <a:lstStyle/>
           <a:p>
             <a:pPr algn="ctr">
@@ -28417,7 +28851,7 @@
           </a:fontRef>
         </p:style>
         <p:txBody>
-          <a:bodyPr rtlCol="0" anchor="ctr" wrap="square"/>
+          <a:bodyPr wrap="square" rtlCol="0" anchor="ctr"/>
           <a:lstStyle/>
           <a:p>
             <a:pPr algn="ctr">
@@ -28520,7 +28954,7 @@
           </a:fontRef>
         </p:style>
         <p:txBody>
-          <a:bodyPr rtlCol="0" anchor="ctr" wrap="square"/>
+          <a:bodyPr wrap="square" rtlCol="0" anchor="ctr"/>
           <a:lstStyle/>
           <a:p>
             <a:pPr algn="ctr">
@@ -28623,7 +29057,7 @@
           </a:fontRef>
         </p:style>
         <p:txBody>
-          <a:bodyPr rtlCol="0" anchor="ctr" wrap="square"/>
+          <a:bodyPr wrap="square" rtlCol="0" anchor="ctr"/>
           <a:lstStyle/>
           <a:p>
             <a:pPr algn="ctr">
@@ -28726,7 +29160,7 @@
           </a:fontRef>
         </p:style>
         <p:txBody>
-          <a:bodyPr rtlCol="0" anchor="ctr" wrap="square"/>
+          <a:bodyPr wrap="square" rtlCol="0" anchor="ctr"/>
           <a:lstStyle/>
           <a:p>
             <a:pPr algn="ctr">
@@ -28787,7 +29221,7 @@
           </a:fontRef>
         </p:style>
         <p:txBody>
-          <a:bodyPr rtlCol="0" anchor="ctr" wrap="square"/>
+          <a:bodyPr wrap="square" rtlCol="0" anchor="ctr"/>
           <a:lstStyle/>
           <a:p>
             <a:pPr algn="ctr">
@@ -28890,7 +29324,7 @@
           </a:fontRef>
         </p:style>
         <p:txBody>
-          <a:bodyPr rtlCol="0" anchor="ctr" wrap="square"/>
+          <a:bodyPr wrap="square" rtlCol="0" anchor="ctr"/>
           <a:lstStyle/>
           <a:p>
             <a:pPr algn="ctr">
@@ -29006,7 +29440,7 @@
 </file>
 
 <file path=ppt/slides/slide5.xml><?xml version="1.0" encoding="utf-8"?>
-<p:sld xmlns:a="http://schemas.openxmlformats.org/drawingml/2006/main" xmlns:p="http://schemas.openxmlformats.org/presentationml/2006/main" xmlns:r="http://schemas.openxmlformats.org/officeDocument/2006/relationships">
+<p:sld xmlns:a="http://schemas.openxmlformats.org/drawingml/2006/main" xmlns:r="http://schemas.openxmlformats.org/officeDocument/2006/relationships" xmlns:p="http://schemas.openxmlformats.org/presentationml/2006/main">
   <p:cSld>
     <p:spTree>
       <p:nvGrpSpPr>
@@ -29014,7 +29448,14 @@
         <p:cNvGrpSpPr/>
         <p:nvPr/>
       </p:nvGrpSpPr>
-      <p:grpSpPr/>
+      <p:grpSpPr>
+        <a:xfrm>
+          <a:off x="0" y="0"/>
+          <a:ext cx="0" cy="0"/>
+          <a:chOff x="0" y="0"/>
+          <a:chExt cx="0" cy="0"/>
+        </a:xfrm>
+      </p:grpSpPr>
       <p:sp>
         <p:nvSpPr>
           <p:cNvPr id="2" name="Rectangle 1"/>
@@ -29055,6 +29496,7 @@
           <a:lstStyle/>
           <a:p>
             <a:pPr algn="ctr"/>
+            <a:endParaRPr/>
           </a:p>
         </p:txBody>
       </p:sp>
@@ -29180,7 +29622,7 @@
           </a:fontRef>
         </p:style>
         <p:txBody>
-          <a:bodyPr rtlCol="0" anchor="ctr" wrap="square"/>
+          <a:bodyPr wrap="square" rtlCol="0" anchor="ctr"/>
           <a:lstStyle/>
           <a:p>
             <a:pPr algn="ctr">
@@ -29239,7 +29681,7 @@
           </a:fontRef>
         </p:style>
         <p:txBody>
-          <a:bodyPr rtlCol="0" anchor="ctr" wrap="square"/>
+          <a:bodyPr wrap="square" rtlCol="0" anchor="ctr"/>
           <a:lstStyle/>
           <a:p>
             <a:pPr algn="ctr">
@@ -29515,7 +29957,7 @@
           </a:fontRef>
         </p:style>
         <p:txBody>
-          <a:bodyPr rtlCol="0" anchor="ctr" wrap="square"/>
+          <a:bodyPr wrap="square" rtlCol="0" anchor="ctr"/>
           <a:lstStyle/>
           <a:p>
             <a:pPr algn="ctr">
@@ -29749,7 +30191,7 @@
           </a:fontRef>
         </p:style>
         <p:txBody>
-          <a:bodyPr rtlCol="0" anchor="ctr" wrap="square"/>
+          <a:bodyPr wrap="square" rtlCol="0" anchor="ctr"/>
           <a:lstStyle/>
           <a:p>
             <a:pPr algn="ctr">
@@ -29985,7 +30427,7 @@
           </a:fontRef>
         </p:style>
         <p:txBody>
-          <a:bodyPr rtlCol="0" anchor="ctr" wrap="square"/>
+          <a:bodyPr wrap="square" rtlCol="0" anchor="ctr"/>
           <a:lstStyle/>
           <a:p>
             <a:pPr algn="l">
@@ -30127,7 +30569,7 @@
 </file>
 
 <file path=ppt/slides/slide6.xml><?xml version="1.0" encoding="utf-8"?>
-<p:sld xmlns:a="http://schemas.openxmlformats.org/drawingml/2006/main" xmlns:p="http://schemas.openxmlformats.org/presentationml/2006/main" xmlns:r="http://schemas.openxmlformats.org/officeDocument/2006/relationships">
+<p:sld xmlns:a="http://schemas.openxmlformats.org/drawingml/2006/main" xmlns:r="http://schemas.openxmlformats.org/officeDocument/2006/relationships" xmlns:p="http://schemas.openxmlformats.org/presentationml/2006/main">
   <p:cSld>
     <p:spTree>
       <p:nvGrpSpPr>
@@ -30135,7 +30577,14 @@
         <p:cNvGrpSpPr/>
         <p:nvPr/>
       </p:nvGrpSpPr>
-      <p:grpSpPr/>
+      <p:grpSpPr>
+        <a:xfrm>
+          <a:off x="0" y="0"/>
+          <a:ext cx="0" cy="0"/>
+          <a:chOff x="0" y="0"/>
+          <a:chExt cx="0" cy="0"/>
+        </a:xfrm>
+      </p:grpSpPr>
       <p:sp>
         <p:nvSpPr>
           <p:cNvPr id="2" name="Rectangle 1"/>
@@ -30176,6 +30625,7 @@
           <a:lstStyle/>
           <a:p>
             <a:pPr algn="ctr"/>
+            <a:endParaRPr/>
           </a:p>
         </p:txBody>
       </p:sp>
@@ -30282,10 +30732,34 @@
                 <a:tableStyleId>{5C22544A-7EE6-4342-B048-85BDC9FD1C3A}</a:tableStyleId>
               </a:tblPr>
               <a:tblGrid>
-                <a:gridCol w="1828800"/>
-                <a:gridCol w="2743200"/>
-                <a:gridCol w="4114800"/>
-                <a:gridCol w="2560320"/>
+                <a:gridCol w="1828800">
+                  <a:extLst>
+                    <a:ext uri="{9D8B030D-6E8A-4147-A177-3AD203B41FA5}">
+                      <a16:colId xmlns:a16="http://schemas.microsoft.com/office/drawing/2014/main" val="20000"/>
+                    </a:ext>
+                  </a:extLst>
+                </a:gridCol>
+                <a:gridCol w="2743200">
+                  <a:extLst>
+                    <a:ext uri="{9D8B030D-6E8A-4147-A177-3AD203B41FA5}">
+                      <a16:colId xmlns:a16="http://schemas.microsoft.com/office/drawing/2014/main" val="20001"/>
+                    </a:ext>
+                  </a:extLst>
+                </a:gridCol>
+                <a:gridCol w="4114800">
+                  <a:extLst>
+                    <a:ext uri="{9D8B030D-6E8A-4147-A177-3AD203B41FA5}">
+                      <a16:colId xmlns:a16="http://schemas.microsoft.com/office/drawing/2014/main" val="20002"/>
+                    </a:ext>
+                  </a:extLst>
+                </a:gridCol>
+                <a:gridCol w="2560320">
+                  <a:extLst>
+                    <a:ext uri="{9D8B030D-6E8A-4147-A177-3AD203B41FA5}">
+                      <a16:colId xmlns:a16="http://schemas.microsoft.com/office/drawing/2014/main" val="20003"/>
+                    </a:ext>
+                  </a:extLst>
+                </a:gridCol>
               </a:tblGrid>
               <a:tr h="426720">
                 <a:tc>
@@ -30408,6 +30882,11 @@
                     </a:solidFill>
                   </a:tcPr>
                 </a:tc>
+                <a:extLst>
+                  <a:ext uri="{0D108BD9-81ED-4DB2-BD59-A6C34878D82A}">
+                    <a16:rowId xmlns:a16="http://schemas.microsoft.com/office/drawing/2014/main" val="10000"/>
+                  </a:ext>
+                </a:extLst>
               </a:tr>
               <a:tr h="426720">
                 <a:tc>
@@ -30530,6 +31009,11 @@
                     </a:solidFill>
                   </a:tcPr>
                 </a:tc>
+                <a:extLst>
+                  <a:ext uri="{0D108BD9-81ED-4DB2-BD59-A6C34878D82A}">
+                    <a16:rowId xmlns:a16="http://schemas.microsoft.com/office/drawing/2014/main" val="10001"/>
+                  </a:ext>
+                </a:extLst>
               </a:tr>
               <a:tr h="426720">
                 <a:tc>
@@ -30641,6 +31125,7 @@
                           <a:latin typeface="Meiryo"/>
                         </a:defRPr>
                       </a:pPr>
+                      <a:endParaRPr/>
                     </a:p>
                   </a:txBody>
                   <a:tcPr>
@@ -30649,6 +31134,11 @@
                     </a:solidFill>
                   </a:tcPr>
                 </a:tc>
+                <a:extLst>
+                  <a:ext uri="{0D108BD9-81ED-4DB2-BD59-A6C34878D82A}">
+                    <a16:rowId xmlns:a16="http://schemas.microsoft.com/office/drawing/2014/main" val="10002"/>
+                  </a:ext>
+                </a:extLst>
               </a:tr>
               <a:tr h="426720">
                 <a:tc>
@@ -30771,6 +31261,11 @@
                     </a:solidFill>
                   </a:tcPr>
                 </a:tc>
+                <a:extLst>
+                  <a:ext uri="{0D108BD9-81ED-4DB2-BD59-A6C34878D82A}">
+                    <a16:rowId xmlns:a16="http://schemas.microsoft.com/office/drawing/2014/main" val="10003"/>
+                  </a:ext>
+                </a:extLst>
               </a:tr>
               <a:tr h="426720">
                 <a:tc>
@@ -30893,6 +31388,11 @@
                     </a:solidFill>
                   </a:tcPr>
                 </a:tc>
+                <a:extLst>
+                  <a:ext uri="{0D108BD9-81ED-4DB2-BD59-A6C34878D82A}">
+                    <a16:rowId xmlns:a16="http://schemas.microsoft.com/office/drawing/2014/main" val="10004"/>
+                  </a:ext>
+                </a:extLst>
               </a:tr>
               <a:tr h="426720">
                 <a:tc>
@@ -31015,6 +31515,11 @@
                     </a:solidFill>
                   </a:tcPr>
                 </a:tc>
+                <a:extLst>
+                  <a:ext uri="{0D108BD9-81ED-4DB2-BD59-A6C34878D82A}">
+                    <a16:rowId xmlns:a16="http://schemas.microsoft.com/office/drawing/2014/main" val="10005"/>
+                  </a:ext>
+                </a:extLst>
               </a:tr>
               <a:tr h="426720">
                 <a:tc>
@@ -31126,6 +31631,7 @@
                           <a:latin typeface="Meiryo"/>
                         </a:defRPr>
                       </a:pPr>
+                      <a:endParaRPr/>
                     </a:p>
                   </a:txBody>
                   <a:tcPr>
@@ -31134,6 +31640,11 @@
                     </a:solidFill>
                   </a:tcPr>
                 </a:tc>
+                <a:extLst>
+                  <a:ext uri="{0D108BD9-81ED-4DB2-BD59-A6C34878D82A}">
+                    <a16:rowId xmlns:a16="http://schemas.microsoft.com/office/drawing/2014/main" val="10006"/>
+                  </a:ext>
+                </a:extLst>
               </a:tr>
               <a:tr h="426720">
                 <a:tc>
@@ -31256,6 +31767,11 @@
                     </a:solidFill>
                   </a:tcPr>
                 </a:tc>
+                <a:extLst>
+                  <a:ext uri="{0D108BD9-81ED-4DB2-BD59-A6C34878D82A}">
+                    <a16:rowId xmlns:a16="http://schemas.microsoft.com/office/drawing/2014/main" val="10007"/>
+                  </a:ext>
+                </a:extLst>
               </a:tr>
               <a:tr h="426720">
                 <a:tc>
@@ -31367,6 +31883,7 @@
                           <a:latin typeface="Meiryo"/>
                         </a:defRPr>
                       </a:pPr>
+                      <a:endParaRPr/>
                     </a:p>
                   </a:txBody>
                   <a:tcPr>
@@ -31375,6 +31892,11 @@
                     </a:solidFill>
                   </a:tcPr>
                 </a:tc>
+                <a:extLst>
+                  <a:ext uri="{0D108BD9-81ED-4DB2-BD59-A6C34878D82A}">
+                    <a16:rowId xmlns:a16="http://schemas.microsoft.com/office/drawing/2014/main" val="10008"/>
+                  </a:ext>
+                </a:extLst>
               </a:tr>
             </a:tbl>
           </a:graphicData>
@@ -31670,7 +32192,7 @@
           </a:fontRef>
         </p:style>
         <p:txBody>
-          <a:bodyPr rtlCol="0" anchor="ctr" wrap="square"/>
+          <a:bodyPr wrap="square" rtlCol="0" anchor="ctr"/>
           <a:lstStyle/>
           <a:p>
             <a:pPr algn="ctr">
@@ -31799,7 +32321,7 @@
 </file>
 
 <file path=ppt/slides/slide7.xml><?xml version="1.0" encoding="utf-8"?>
-<p:sld xmlns:a="http://schemas.openxmlformats.org/drawingml/2006/main" xmlns:p="http://schemas.openxmlformats.org/presentationml/2006/main" xmlns:r="http://schemas.openxmlformats.org/officeDocument/2006/relationships">
+<p:sld xmlns:a="http://schemas.openxmlformats.org/drawingml/2006/main" xmlns:r="http://schemas.openxmlformats.org/officeDocument/2006/relationships" xmlns:p="http://schemas.openxmlformats.org/presentationml/2006/main">
   <p:cSld>
     <p:spTree>
       <p:nvGrpSpPr>
@@ -31807,7 +32329,14 @@
         <p:cNvGrpSpPr/>
         <p:nvPr/>
       </p:nvGrpSpPr>
-      <p:grpSpPr/>
+      <p:grpSpPr>
+        <a:xfrm>
+          <a:off x="0" y="0"/>
+          <a:ext cx="0" cy="0"/>
+          <a:chOff x="0" y="0"/>
+          <a:chExt cx="0" cy="0"/>
+        </a:xfrm>
+      </p:grpSpPr>
       <p:sp>
         <p:nvSpPr>
           <p:cNvPr id="2" name="Rectangle 1"/>
@@ -31848,6 +32377,7 @@
           <a:lstStyle/>
           <a:p>
             <a:pPr algn="ctr"/>
+            <a:endParaRPr/>
           </a:p>
         </p:txBody>
       </p:sp>
@@ -31954,11 +32484,41 @@
                 <a:tableStyleId>{5C22544A-7EE6-4342-B048-85BDC9FD1C3A}</a:tableStyleId>
               </a:tblPr>
               <a:tblGrid>
-                <a:gridCol w="914400"/>
-                <a:gridCol w="1097280"/>
-                <a:gridCol w="1828800"/>
-                <a:gridCol w="1645920"/>
-                <a:gridCol w="914400"/>
+                <a:gridCol w="914400">
+                  <a:extLst>
+                    <a:ext uri="{9D8B030D-6E8A-4147-A177-3AD203B41FA5}">
+                      <a16:colId xmlns:a16="http://schemas.microsoft.com/office/drawing/2014/main" val="20000"/>
+                    </a:ext>
+                  </a:extLst>
+                </a:gridCol>
+                <a:gridCol w="1097280">
+                  <a:extLst>
+                    <a:ext uri="{9D8B030D-6E8A-4147-A177-3AD203B41FA5}">
+                      <a16:colId xmlns:a16="http://schemas.microsoft.com/office/drawing/2014/main" val="20001"/>
+                    </a:ext>
+                  </a:extLst>
+                </a:gridCol>
+                <a:gridCol w="1828800">
+                  <a:extLst>
+                    <a:ext uri="{9D8B030D-6E8A-4147-A177-3AD203B41FA5}">
+                      <a16:colId xmlns:a16="http://schemas.microsoft.com/office/drawing/2014/main" val="20002"/>
+                    </a:ext>
+                  </a:extLst>
+                </a:gridCol>
+                <a:gridCol w="1645920">
+                  <a:extLst>
+                    <a:ext uri="{9D8B030D-6E8A-4147-A177-3AD203B41FA5}">
+                      <a16:colId xmlns:a16="http://schemas.microsoft.com/office/drawing/2014/main" val="20003"/>
+                    </a:ext>
+                  </a:extLst>
+                </a:gridCol>
+                <a:gridCol w="914400">
+                  <a:extLst>
+                    <a:ext uri="{9D8B030D-6E8A-4147-A177-3AD203B41FA5}">
+                      <a16:colId xmlns:a16="http://schemas.microsoft.com/office/drawing/2014/main" val="20004"/>
+                    </a:ext>
+                  </a:extLst>
+                </a:gridCol>
               </a:tblGrid>
               <a:tr h="457200">
                 <a:tc>
@@ -32111,6 +32671,11 @@
                     </a:solidFill>
                   </a:tcPr>
                 </a:tc>
+                <a:extLst>
+                  <a:ext uri="{0D108BD9-81ED-4DB2-BD59-A6C34878D82A}">
+                    <a16:rowId xmlns:a16="http://schemas.microsoft.com/office/drawing/2014/main" val="10000"/>
+                  </a:ext>
+                </a:extLst>
               </a:tr>
               <a:tr h="457200">
                 <a:tc>
@@ -32263,6 +32828,11 @@
                     </a:solidFill>
                   </a:tcPr>
                 </a:tc>
+                <a:extLst>
+                  <a:ext uri="{0D108BD9-81ED-4DB2-BD59-A6C34878D82A}">
+                    <a16:rowId xmlns:a16="http://schemas.microsoft.com/office/drawing/2014/main" val="10001"/>
+                  </a:ext>
+                </a:extLst>
               </a:tr>
               <a:tr h="457200">
                 <a:tc>
@@ -32415,6 +32985,11 @@
                     </a:solidFill>
                   </a:tcPr>
                 </a:tc>
+                <a:extLst>
+                  <a:ext uri="{0D108BD9-81ED-4DB2-BD59-A6C34878D82A}">
+                    <a16:rowId xmlns:a16="http://schemas.microsoft.com/office/drawing/2014/main" val="10002"/>
+                  </a:ext>
+                </a:extLst>
               </a:tr>
               <a:tr h="457200">
                 <a:tc>
@@ -32567,6 +33142,11 @@
                     </a:solidFill>
                   </a:tcPr>
                 </a:tc>
+                <a:extLst>
+                  <a:ext uri="{0D108BD9-81ED-4DB2-BD59-A6C34878D82A}">
+                    <a16:rowId xmlns:a16="http://schemas.microsoft.com/office/drawing/2014/main" val="10003"/>
+                  </a:ext>
+                </a:extLst>
               </a:tr>
               <a:tr h="457200">
                 <a:tc>
@@ -32719,6 +33299,11 @@
                     </a:solidFill>
                   </a:tcPr>
                 </a:tc>
+                <a:extLst>
+                  <a:ext uri="{0D108BD9-81ED-4DB2-BD59-A6C34878D82A}">
+                    <a16:rowId xmlns:a16="http://schemas.microsoft.com/office/drawing/2014/main" val="10004"/>
+                  </a:ext>
+                </a:extLst>
               </a:tr>
               <a:tr h="457200">
                 <a:tc>
@@ -32871,6 +33456,11 @@
                     </a:solidFill>
                   </a:tcPr>
                 </a:tc>
+                <a:extLst>
+                  <a:ext uri="{0D108BD9-81ED-4DB2-BD59-A6C34878D82A}">
+                    <a16:rowId xmlns:a16="http://schemas.microsoft.com/office/drawing/2014/main" val="10005"/>
+                  </a:ext>
+                </a:extLst>
               </a:tr>
               <a:tr h="457200">
                 <a:tc>
@@ -33023,6 +33613,11 @@
                     </a:solidFill>
                   </a:tcPr>
                 </a:tc>
+                <a:extLst>
+                  <a:ext uri="{0D108BD9-81ED-4DB2-BD59-A6C34878D82A}">
+                    <a16:rowId xmlns:a16="http://schemas.microsoft.com/office/drawing/2014/main" val="10006"/>
+                  </a:ext>
+                </a:extLst>
               </a:tr>
               <a:tr h="457200">
                 <a:tc>
@@ -33175,6 +33770,11 @@
                     </a:solidFill>
                   </a:tcPr>
                 </a:tc>
+                <a:extLst>
+                  <a:ext uri="{0D108BD9-81ED-4DB2-BD59-A6C34878D82A}">
+                    <a16:rowId xmlns:a16="http://schemas.microsoft.com/office/drawing/2014/main" val="10007"/>
+                  </a:ext>
+                </a:extLst>
               </a:tr>
             </a:tbl>
           </a:graphicData>
@@ -33260,7 +33860,7 @@
           </a:fontRef>
         </p:style>
         <p:txBody>
-          <a:bodyPr rtlCol="0" anchor="ctr" wrap="square"/>
+          <a:bodyPr wrap="square" rtlCol="0" anchor="ctr"/>
           <a:lstStyle/>
           <a:p>
             <a:pPr algn="ctr">
@@ -33271,6 +33871,7 @@
                 <a:spcPts val="0"/>
               </a:spcAft>
             </a:pPr>
+            <a:endParaRPr/>
           </a:p>
         </p:txBody>
       </p:sp>
@@ -33396,7 +33997,7 @@
           </a:fontRef>
         </p:style>
         <p:txBody>
-          <a:bodyPr rtlCol="0" anchor="ctr" wrap="square"/>
+          <a:bodyPr wrap="square" rtlCol="0" anchor="ctr"/>
           <a:lstStyle/>
           <a:p>
             <a:pPr algn="ctr">
@@ -33407,6 +34008,7 @@
                 <a:spcPts val="0"/>
               </a:spcAft>
             </a:pPr>
+            <a:endParaRPr/>
           </a:p>
         </p:txBody>
       </p:sp>
@@ -33532,7 +34134,7 @@
           </a:fontRef>
         </p:style>
         <p:txBody>
-          <a:bodyPr rtlCol="0" anchor="ctr" wrap="square"/>
+          <a:bodyPr wrap="square" rtlCol="0" anchor="ctr"/>
           <a:lstStyle/>
           <a:p>
             <a:pPr algn="ctr">
@@ -33543,6 +34145,7 @@
                 <a:spcPts val="0"/>
               </a:spcAft>
             </a:pPr>
+            <a:endParaRPr/>
           </a:p>
         </p:txBody>
       </p:sp>
@@ -33668,7 +34271,7 @@
           </a:fontRef>
         </p:style>
         <p:txBody>
-          <a:bodyPr rtlCol="0" anchor="ctr" wrap="square"/>
+          <a:bodyPr wrap="square" rtlCol="0" anchor="ctr"/>
           <a:lstStyle/>
           <a:p>
             <a:pPr algn="ctr">
@@ -33679,6 +34282,7 @@
                 <a:spcPts val="0"/>
               </a:spcAft>
             </a:pPr>
+            <a:endParaRPr/>
           </a:p>
         </p:txBody>
       </p:sp>
@@ -33804,7 +34408,7 @@
           </a:fontRef>
         </p:style>
         <p:txBody>
-          <a:bodyPr rtlCol="0" anchor="ctr" wrap="square"/>
+          <a:bodyPr wrap="square" rtlCol="0" anchor="ctr"/>
           <a:lstStyle/>
           <a:p>
             <a:pPr algn="ctr">
@@ -33815,6 +34419,7 @@
                 <a:spcPts val="0"/>
               </a:spcAft>
             </a:pPr>
+            <a:endParaRPr/>
           </a:p>
         </p:txBody>
       </p:sp>
@@ -33940,7 +34545,7 @@
           </a:fontRef>
         </p:style>
         <p:txBody>
-          <a:bodyPr rtlCol="0" anchor="ctr" wrap="square"/>
+          <a:bodyPr wrap="square" rtlCol="0" anchor="ctr"/>
           <a:lstStyle/>
           <a:p>
             <a:pPr algn="ctr">
@@ -33951,6 +34556,7 @@
                 <a:spcPts val="0"/>
               </a:spcAft>
             </a:pPr>
+            <a:endParaRPr/>
           </a:p>
         </p:txBody>
       </p:sp>
@@ -34131,6 +34737,7 @@
                 <a:latin typeface="Meiryo"/>
               </a:defRPr>
             </a:pPr>
+            <a:endParaRPr/>
           </a:p>
           <a:p>
             <a:pPr algn="l">
@@ -34166,6 +34773,7 @@
                 <a:latin typeface="Meiryo"/>
               </a:defRPr>
             </a:pPr>
+            <a:endParaRPr/>
           </a:p>
           <a:p>
             <a:pPr algn="l">
@@ -34327,7 +34935,7 @@
 </file>
 
 <file path=ppt/slides/slide8.xml><?xml version="1.0" encoding="utf-8"?>
-<p:sld xmlns:a="http://schemas.openxmlformats.org/drawingml/2006/main" xmlns:p="http://schemas.openxmlformats.org/presentationml/2006/main" xmlns:r="http://schemas.openxmlformats.org/officeDocument/2006/relationships">
+<p:sld xmlns:a="http://schemas.openxmlformats.org/drawingml/2006/main" xmlns:r="http://schemas.openxmlformats.org/officeDocument/2006/relationships" xmlns:p="http://schemas.openxmlformats.org/presentationml/2006/main">
   <p:cSld>
     <p:spTree>
       <p:nvGrpSpPr>
@@ -34335,7 +34943,14 @@
         <p:cNvGrpSpPr/>
         <p:nvPr/>
       </p:nvGrpSpPr>
-      <p:grpSpPr/>
+      <p:grpSpPr>
+        <a:xfrm>
+          <a:off x="0" y="0"/>
+          <a:ext cx="0" cy="0"/>
+          <a:chOff x="0" y="0"/>
+          <a:chExt cx="0" cy="0"/>
+        </a:xfrm>
+      </p:grpSpPr>
       <p:sp>
         <p:nvSpPr>
           <p:cNvPr id="2" name="Rectangle 1"/>
@@ -34376,6 +34991,7 @@
           <a:lstStyle/>
           <a:p>
             <a:pPr algn="ctr"/>
+            <a:endParaRPr/>
           </a:p>
         </p:txBody>
       </p:sp>
@@ -34881,6 +35497,7 @@
           <a:lstStyle/>
           <a:p>
             <a:pPr algn="ctr"/>
+            <a:endParaRPr/>
           </a:p>
         </p:txBody>
       </p:sp>
@@ -35006,7 +35623,7 @@
           </a:fontRef>
         </p:style>
         <p:txBody>
-          <a:bodyPr rtlCol="0" anchor="ctr" wrap="square"/>
+          <a:bodyPr wrap="square" rtlCol="0" anchor="ctr"/>
           <a:lstStyle/>
           <a:p>
             <a:pPr algn="ctr">
@@ -35542,7 +36159,7 @@
           </a:fontRef>
         </p:style>
         <p:txBody>
-          <a:bodyPr rtlCol="0" anchor="ctr" wrap="square"/>
+          <a:bodyPr wrap="square" rtlCol="0" anchor="ctr"/>
           <a:lstStyle/>
           <a:p>
             <a:pPr algn="ctr">
@@ -35649,7 +36266,7 @@
           </a:fontRef>
         </p:style>
         <p:txBody>
-          <a:bodyPr rtlCol="0" anchor="ctr" wrap="square"/>
+          <a:bodyPr wrap="square" rtlCol="0" anchor="ctr"/>
           <a:lstStyle/>
           <a:p>
             <a:pPr algn="ctr">
@@ -35736,7 +36353,7 @@
           </a:fontRef>
         </p:style>
         <p:txBody>
-          <a:bodyPr rtlCol="0" anchor="ctr" wrap="square"/>
+          <a:bodyPr wrap="square" rtlCol="0" anchor="ctr"/>
           <a:lstStyle/>
           <a:p>
             <a:pPr algn="ctr">
@@ -35836,7 +36453,7 @@
           </a:fontRef>
         </p:style>
         <p:txBody>
-          <a:bodyPr rtlCol="0" anchor="ctr" wrap="square"/>
+          <a:bodyPr wrap="square" rtlCol="0" anchor="ctr"/>
           <a:lstStyle/>
           <a:p>
             <a:pPr algn="ctr">
@@ -35897,7 +36514,7 @@
           </a:fontRef>
         </p:style>
         <p:txBody>
-          <a:bodyPr rtlCol="0" anchor="ctr" wrap="square"/>
+          <a:bodyPr wrap="square" rtlCol="0" anchor="ctr"/>
           <a:lstStyle/>
           <a:p>
             <a:pPr algn="ctr">
@@ -36013,7 +36630,7 @@
 </file>
 
 <file path=ppt/slides/slide9.xml><?xml version="1.0" encoding="utf-8"?>
-<p:sld xmlns:a="http://schemas.openxmlformats.org/drawingml/2006/main" xmlns:p="http://schemas.openxmlformats.org/presentationml/2006/main" xmlns:r="http://schemas.openxmlformats.org/officeDocument/2006/relationships">
+<p:sld xmlns:a="http://schemas.openxmlformats.org/drawingml/2006/main" xmlns:r="http://schemas.openxmlformats.org/officeDocument/2006/relationships" xmlns:p="http://schemas.openxmlformats.org/presentationml/2006/main">
   <p:cSld>
     <p:spTree>
       <p:nvGrpSpPr>
@@ -36021,7 +36638,14 @@
         <p:cNvGrpSpPr/>
         <p:nvPr/>
       </p:nvGrpSpPr>
-      <p:grpSpPr/>
+      <p:grpSpPr>
+        <a:xfrm>
+          <a:off x="0" y="0"/>
+          <a:ext cx="0" cy="0"/>
+          <a:chOff x="0" y="0"/>
+          <a:chExt cx="0" cy="0"/>
+        </a:xfrm>
+      </p:grpSpPr>
       <p:sp>
         <p:nvSpPr>
           <p:cNvPr id="2" name="Rectangle 1"/>
@@ -36062,6 +36686,7 @@
           <a:lstStyle/>
           <a:p>
             <a:pPr algn="ctr"/>
+            <a:endParaRPr/>
           </a:p>
         </p:txBody>
       </p:sp>
@@ -36168,12 +36793,48 @@
                 <a:tableStyleId>{5C22544A-7EE6-4342-B048-85BDC9FD1C3A}</a:tableStyleId>
               </a:tblPr>
               <a:tblGrid>
-                <a:gridCol w="914400"/>
-                <a:gridCol w="1828800"/>
-                <a:gridCol w="1828800"/>
-                <a:gridCol w="1828800"/>
-                <a:gridCol w="2286000"/>
-                <a:gridCol w="1371600"/>
+                <a:gridCol w="914400">
+                  <a:extLst>
+                    <a:ext uri="{9D8B030D-6E8A-4147-A177-3AD203B41FA5}">
+                      <a16:colId xmlns:a16="http://schemas.microsoft.com/office/drawing/2014/main" val="20000"/>
+                    </a:ext>
+                  </a:extLst>
+                </a:gridCol>
+                <a:gridCol w="1828800">
+                  <a:extLst>
+                    <a:ext uri="{9D8B030D-6E8A-4147-A177-3AD203B41FA5}">
+                      <a16:colId xmlns:a16="http://schemas.microsoft.com/office/drawing/2014/main" val="20001"/>
+                    </a:ext>
+                  </a:extLst>
+                </a:gridCol>
+                <a:gridCol w="1828800">
+                  <a:extLst>
+                    <a:ext uri="{9D8B030D-6E8A-4147-A177-3AD203B41FA5}">
+                      <a16:colId xmlns:a16="http://schemas.microsoft.com/office/drawing/2014/main" val="20002"/>
+                    </a:ext>
+                  </a:extLst>
+                </a:gridCol>
+                <a:gridCol w="1828800">
+                  <a:extLst>
+                    <a:ext uri="{9D8B030D-6E8A-4147-A177-3AD203B41FA5}">
+                      <a16:colId xmlns:a16="http://schemas.microsoft.com/office/drawing/2014/main" val="20003"/>
+                    </a:ext>
+                  </a:extLst>
+                </a:gridCol>
+                <a:gridCol w="2286000">
+                  <a:extLst>
+                    <a:ext uri="{9D8B030D-6E8A-4147-A177-3AD203B41FA5}">
+                      <a16:colId xmlns:a16="http://schemas.microsoft.com/office/drawing/2014/main" val="20004"/>
+                    </a:ext>
+                  </a:extLst>
+                </a:gridCol>
+                <a:gridCol w="1371600">
+                  <a:extLst>
+                    <a:ext uri="{9D8B030D-6E8A-4147-A177-3AD203B41FA5}">
+                      <a16:colId xmlns:a16="http://schemas.microsoft.com/office/drawing/2014/main" val="20005"/>
+                    </a:ext>
+                  </a:extLst>
+                </a:gridCol>
               </a:tblGrid>
               <a:tr h="514350">
                 <a:tc>
@@ -36356,6 +37017,11 @@
                     </a:solidFill>
                   </a:tcPr>
                 </a:tc>
+                <a:extLst>
+                  <a:ext uri="{0D108BD9-81ED-4DB2-BD59-A6C34878D82A}">
+                    <a16:rowId xmlns:a16="http://schemas.microsoft.com/office/drawing/2014/main" val="10000"/>
+                  </a:ext>
+                </a:extLst>
               </a:tr>
               <a:tr h="514350">
                 <a:tc>
@@ -36538,6 +37204,11 @@
                     </a:solidFill>
                   </a:tcPr>
                 </a:tc>
+                <a:extLst>
+                  <a:ext uri="{0D108BD9-81ED-4DB2-BD59-A6C34878D82A}">
+                    <a16:rowId xmlns:a16="http://schemas.microsoft.com/office/drawing/2014/main" val="10001"/>
+                  </a:ext>
+                </a:extLst>
               </a:tr>
               <a:tr h="514350">
                 <a:tc>
@@ -36720,6 +37391,11 @@
                     </a:solidFill>
                   </a:tcPr>
                 </a:tc>
+                <a:extLst>
+                  <a:ext uri="{0D108BD9-81ED-4DB2-BD59-A6C34878D82A}">
+                    <a16:rowId xmlns:a16="http://schemas.microsoft.com/office/drawing/2014/main" val="10002"/>
+                  </a:ext>
+                </a:extLst>
               </a:tr>
               <a:tr h="514350">
                 <a:tc>
@@ -36902,6 +37578,11 @@
                     </a:solidFill>
                   </a:tcPr>
                 </a:tc>
+                <a:extLst>
+                  <a:ext uri="{0D108BD9-81ED-4DB2-BD59-A6C34878D82A}">
+                    <a16:rowId xmlns:a16="http://schemas.microsoft.com/office/drawing/2014/main" val="10003"/>
+                  </a:ext>
+                </a:extLst>
               </a:tr>
               <a:tr h="514350">
                 <a:tc>
@@ -37084,6 +37765,11 @@
                     </a:solidFill>
                   </a:tcPr>
                 </a:tc>
+                <a:extLst>
+                  <a:ext uri="{0D108BD9-81ED-4DB2-BD59-A6C34878D82A}">
+                    <a16:rowId xmlns:a16="http://schemas.microsoft.com/office/drawing/2014/main" val="10004"/>
+                  </a:ext>
+                </a:extLst>
               </a:tr>
               <a:tr h="514350">
                 <a:tc>
@@ -37266,6 +37952,11 @@
                     </a:solidFill>
                   </a:tcPr>
                 </a:tc>
+                <a:extLst>
+                  <a:ext uri="{0D108BD9-81ED-4DB2-BD59-A6C34878D82A}">
+                    <a16:rowId xmlns:a16="http://schemas.microsoft.com/office/drawing/2014/main" val="10005"/>
+                  </a:ext>
+                </a:extLst>
               </a:tr>
               <a:tr h="514350">
                 <a:tc>
@@ -37448,6 +38139,11 @@
                     </a:solidFill>
                   </a:tcPr>
                 </a:tc>
+                <a:extLst>
+                  <a:ext uri="{0D108BD9-81ED-4DB2-BD59-A6C34878D82A}">
+                    <a16:rowId xmlns:a16="http://schemas.microsoft.com/office/drawing/2014/main" val="10006"/>
+                  </a:ext>
+                </a:extLst>
               </a:tr>
               <a:tr h="514350">
                 <a:tc>
@@ -37630,6 +38326,11 @@
                     </a:solidFill>
                   </a:tcPr>
                 </a:tc>
+                <a:extLst>
+                  <a:ext uri="{0D108BD9-81ED-4DB2-BD59-A6C34878D82A}">
+                    <a16:rowId xmlns:a16="http://schemas.microsoft.com/office/drawing/2014/main" val="10007"/>
+                  </a:ext>
+                </a:extLst>
               </a:tr>
             </a:tbl>
           </a:graphicData>
@@ -37673,7 +38374,7 @@
           </a:fontRef>
         </p:style>
         <p:txBody>
-          <a:bodyPr rtlCol="0" anchor="ctr" wrap="square"/>
+          <a:bodyPr wrap="square" rtlCol="0" anchor="ctr"/>
           <a:lstStyle/>
           <a:p>
             <a:pPr algn="ctr">
@@ -37747,7 +38448,7 @@
           </a:fontRef>
         </p:style>
         <p:txBody>
-          <a:bodyPr rtlCol="0" anchor="ctr" wrap="square"/>
+          <a:bodyPr wrap="square" rtlCol="0" anchor="ctr"/>
           <a:lstStyle/>
           <a:p>
             <a:pPr algn="ctr">
@@ -37821,7 +38522,7 @@
           </a:fontRef>
         </p:style>
         <p:txBody>
-          <a:bodyPr rtlCol="0" anchor="ctr" wrap="square"/>
+          <a:bodyPr wrap="square" rtlCol="0" anchor="ctr"/>
           <a:lstStyle/>
           <a:p>
             <a:pPr algn="ctr">
